--- a/project/downloads/kilowott-deck-template.pptx
+++ b/project/downloads/kilowott-deck-template.pptx
@@ -2474,8 +2474,8 @@
         </p:nvSpPr>
         <p:spPr>
           <a:xfrm>
-            <a:off x="11048695" y="6343650"/>
-            <a:ext cx="609600" cy="171450"/>
+            <a:off x="10667695" y="6343650"/>
+            <a:ext cx="990600" cy="171450"/>
           </a:xfrm>
           <a:prstGeom prst="rect">
             <a:avLst/>
@@ -2491,7 +2491,7 @@
               <a:buNone/>
             </a:pPr>
             <a:r>
-              <a:rPr lang="en-US" sz="1000" spc="200" kern="0" dirty="0">
+              <a:rPr lang="en-US" sz="1000" spc="100" kern="0" dirty="0">
                 <a:solidFill>
                   <a:srgbClr val="7A828C"/>
                 </a:solidFill>
@@ -2567,26 +2567,26 @@
         <p:spPr>
           <a:xfrm>
             <a:off x="533400" y="2286000"/>
-            <a:ext cx="11124895" cy="2857500"/>
-          </a:xfrm>
-          <a:prstGeom prst="rect">
-            <a:avLst/>
-          </a:prstGeom>
-          <a:noFill/>
-          <a:ln/>
-        </p:spPr>
-        <p:txBody>
-          <a:bodyPr wrap="square" rtlCol="0" anchor="ctr"/>
+            <a:ext cx="11124895" cy="2286000"/>
+          </a:xfrm>
+          <a:prstGeom prst="rect">
+            <a:avLst/>
+          </a:prstGeom>
+          <a:noFill/>
+          <a:ln/>
+        </p:spPr>
+        <p:txBody>
+          <a:bodyPr wrap="square" rtlCol="0" anchor="t"/>
           <a:lstStyle/>
           <a:p>
             <a:pPr indent="0" marL="0">
               <a:lnSpc>
-                <a:spcPct val="100000"/>
+                <a:spcPct val="102000"/>
               </a:lnSpc>
               <a:buNone/>
             </a:pPr>
             <a:r>
-              <a:rPr lang="en-US" sz="8800" spc="-200" kern="0" dirty="0">
+              <a:rPr lang="en-US" sz="7200" spc="-150" kern="0" dirty="0">
                 <a:solidFill>
                   <a:srgbClr val="0B0F14"/>
                 </a:solidFill>
@@ -2598,12 +2598,12 @@
             </a:r>
             <a:pPr indent="0" marL="0">
               <a:lnSpc>
-                <a:spcPct val="100000"/>
+                <a:spcPct val="102000"/>
               </a:lnSpc>
               <a:buNone/>
             </a:pPr>
             <a:r>
-              <a:rPr lang="en-US" sz="8800" i="1" spc="-200" kern="0" dirty="0">
+              <a:rPr lang="en-US" sz="7200" i="1" spc="-150" kern="0" dirty="0">
                 <a:solidFill>
                   <a:srgbClr val="E4022D"/>
                 </a:solidFill>
@@ -2615,12 +2615,12 @@
             </a:r>
             <a:pPr indent="0" marL="0">
               <a:lnSpc>
-                <a:spcPct val="100000"/>
+                <a:spcPct val="102000"/>
               </a:lnSpc>
               <a:buNone/>
             </a:pPr>
             <a:r>
-              <a:rPr lang="en-US" sz="8800" spc="-200" kern="0" dirty="0">
+              <a:rPr lang="en-US" sz="7200" spc="-150" kern="0" dirty="0">
                 <a:solidFill>
                   <a:srgbClr val="0B0F14"/>
                 </a:solidFill>
@@ -2630,17 +2630,17 @@
               </a:rPr>
               <a:t>,</a:t>
             </a:r>
-            <a:endParaRPr lang="en-US" sz="8800" dirty="0"/>
+            <a:endParaRPr lang="en-US" sz="7200" dirty="0"/>
           </a:p>
           <a:p>
             <a:pPr indent="0" marL="0">
               <a:lnSpc>
-                <a:spcPct val="100000"/>
+                <a:spcPct val="102000"/>
               </a:lnSpc>
               <a:buNone/>
             </a:pPr>
             <a:r>
-              <a:rPr lang="en-US" sz="8800" spc="-200" kern="0" dirty="0">
+              <a:rPr lang="en-US" sz="7200" spc="-150" kern="0" dirty="0">
                 <a:solidFill>
                   <a:srgbClr val="0B0F14"/>
                 </a:solidFill>
@@ -2650,7 +2650,7 @@
               </a:rPr>
               <a:t>not a pitch.</a:t>
             </a:r>
-            <a:endParaRPr lang="en-US" sz="8800" dirty="0"/>
+            <a:endParaRPr lang="en-US" sz="7200" dirty="0"/>
           </a:p>
         </p:txBody>
       </p:sp>
@@ -2662,7 +2662,7 @@
         </p:nvSpPr>
         <p:spPr>
           <a:xfrm>
-            <a:off x="533400" y="4953000"/>
+            <a:off x="533400" y="5334000"/>
             <a:ext cx="3708298" cy="171450"/>
           </a:xfrm>
           <a:prstGeom prst="rect">
@@ -2701,7 +2701,7 @@
         </p:nvSpPr>
         <p:spPr>
           <a:xfrm>
-            <a:off x="533400" y="5162550"/>
+            <a:off x="533400" y="5543550"/>
             <a:ext cx="3708298" cy="266700"/>
           </a:xfrm>
           <a:prstGeom prst="rect">
@@ -2740,7 +2740,7 @@
         </p:nvSpPr>
         <p:spPr>
           <a:xfrm>
-            <a:off x="4241698" y="4953000"/>
+            <a:off x="4241698" y="5334000"/>
             <a:ext cx="3708298" cy="171450"/>
           </a:xfrm>
           <a:prstGeom prst="rect">
@@ -2779,7 +2779,7 @@
         </p:nvSpPr>
         <p:spPr>
           <a:xfrm>
-            <a:off x="4241698" y="5162550"/>
+            <a:off x="4241698" y="5543550"/>
             <a:ext cx="3708298" cy="266700"/>
           </a:xfrm>
           <a:prstGeom prst="rect">
@@ -2818,7 +2818,7 @@
         </p:nvSpPr>
         <p:spPr>
           <a:xfrm>
-            <a:off x="7949997" y="4953000"/>
+            <a:off x="7949997" y="5334000"/>
             <a:ext cx="3708298" cy="171450"/>
           </a:xfrm>
           <a:prstGeom prst="rect">
@@ -2857,7 +2857,7 @@
         </p:nvSpPr>
         <p:spPr>
           <a:xfrm>
-            <a:off x="7949997" y="5162550"/>
+            <a:off x="7949997" y="5543550"/>
             <a:ext cx="3708298" cy="266700"/>
           </a:xfrm>
           <a:prstGeom prst="rect">
@@ -2991,8 +2991,8 @@
         </p:nvSpPr>
         <p:spPr>
           <a:xfrm>
-            <a:off x="11048695" y="6343650"/>
-            <a:ext cx="609600" cy="171450"/>
+            <a:off x="10667695" y="6343650"/>
+            <a:ext cx="990600" cy="171450"/>
           </a:xfrm>
           <a:prstGeom prst="rect">
             <a:avLst/>
@@ -3008,7 +3008,7 @@
               <a:buNone/>
             </a:pPr>
             <a:r>
-              <a:rPr lang="en-US" sz="1000" spc="200" kern="0" dirty="0">
+              <a:rPr lang="en-US" sz="1000" spc="100" kern="0" dirty="0">
                 <a:solidFill>
                   <a:srgbClr val="7A828C"/>
                 </a:solidFill>
@@ -3460,7 +3460,7 @@
               <a:buNone/>
             </a:pPr>
             <a:r>
-              <a:rPr lang="en-US" sz="1600" i="1" spc="-30" kern="0" dirty="0">
+              <a:rPr lang="en-US" sz="1600" spc="-30" kern="0" dirty="0">
                 <a:solidFill>
                   <a:srgbClr val="E4022D"/>
                 </a:solidFill>
@@ -3825,8 +3825,8 @@
         </p:nvSpPr>
         <p:spPr>
           <a:xfrm>
-            <a:off x="11048695" y="6343650"/>
-            <a:ext cx="609600" cy="171450"/>
+            <a:off x="10667695" y="6343650"/>
+            <a:ext cx="990600" cy="171450"/>
           </a:xfrm>
           <a:prstGeom prst="rect">
             <a:avLst/>
@@ -3842,7 +3842,7 @@
               <a:buNone/>
             </a:pPr>
             <a:r>
-              <a:rPr lang="en-US" sz="1000" spc="200" kern="0" dirty="0">
+              <a:rPr lang="en-US" sz="1000" spc="100" kern="0" dirty="0">
                 <a:solidFill>
                   <a:srgbClr val="7A828C"/>
                 </a:solidFill>
@@ -4159,53 +4159,103 @@
       </p:sp>
       <p:sp>
         <p:nvSpPr>
-          <p:cNvPr id="12" name="Text 9"/>
-          <p:cNvSpPr/>
-          <p:nvPr/>
-        </p:nvSpPr>
-        <p:spPr>
-          <a:xfrm>
-            <a:off x="742950" y="3981450"/>
-            <a:ext cx="133350" cy="152400"/>
-          </a:xfrm>
-          <a:prstGeom prst="rect">
-            <a:avLst/>
-          </a:prstGeom>
-          <a:noFill/>
-          <a:ln/>
-        </p:spPr>
-        <p:txBody>
-          <a:bodyPr wrap="square" rtlCol="0" anchor="ctr"/>
-          <a:lstStyle/>
-          <a:p>
-            <a:pPr indent="0" marL="0">
-              <a:buNone/>
-            </a:pPr>
-            <a:r>
-              <a:rPr lang="en-US" sz="1100" b="1" dirty="0">
-                <a:solidFill>
-                  <a:srgbClr val="E4022D"/>
+          <p:cNvPr id="12" name="Shape 9"/>
+          <p:cNvSpPr/>
+          <p:nvPr/>
+        </p:nvSpPr>
+        <p:spPr>
+          <a:xfrm>
+            <a:off x="762000" y="4057650"/>
+            <a:ext cx="57150" cy="57150"/>
+          </a:xfrm>
+          <a:prstGeom prst="ellipse">
+            <a:avLst/>
+          </a:prstGeom>
+          <a:solidFill>
+            <a:srgbClr val="E4022D"/>
+          </a:solidFill>
+          <a:ln w="12700">
+            <a:solidFill>
+              <a:srgbClr val="E4022D"/>
+            </a:solidFill>
+            <a:prstDash val="solid"/>
+          </a:ln>
+        </p:spPr>
+      </p:sp>
+      <p:sp>
+        <p:nvSpPr>
+          <p:cNvPr id="13" name="Text 10"/>
+          <p:cNvSpPr/>
+          <p:nvPr/>
+        </p:nvSpPr>
+        <p:spPr>
+          <a:xfrm>
+            <a:off x="895350" y="3981450"/>
+            <a:ext cx="3009798" cy="209550"/>
+          </a:xfrm>
+          <a:prstGeom prst="rect">
+            <a:avLst/>
+          </a:prstGeom>
+          <a:noFill/>
+          <a:ln/>
+        </p:spPr>
+        <p:txBody>
+          <a:bodyPr wrap="square" rtlCol="0" anchor="ctr"/>
+          <a:lstStyle/>
+          <a:p>
+            <a:pPr indent="0" marL="0">
+              <a:buNone/>
+            </a:pPr>
+            <a:r>
+              <a:rPr lang="en-US" sz="1200" dirty="0">
+                <a:solidFill>
+                  <a:srgbClr val="0B0F14"/>
                 </a:solidFill>
                 <a:latin typeface="DM Sans" pitchFamily="34" charset="0"/>
                 <a:ea typeface="DM Sans" pitchFamily="34" charset="-122"/>
                 <a:cs typeface="DM Sans" pitchFamily="34" charset="-120"/>
               </a:rPr>
-              <a:t>✓</a:t>
-            </a:r>
-            <a:endParaRPr lang="en-US" sz="1100" dirty="0"/>
-          </a:p>
-        </p:txBody>
-      </p:sp>
-      <p:sp>
-        <p:nvSpPr>
-          <p:cNvPr id="13" name="Text 10"/>
-          <p:cNvSpPr/>
-          <p:nvPr/>
-        </p:nvSpPr>
-        <p:spPr>
-          <a:xfrm>
-            <a:off x="914400" y="3962400"/>
-            <a:ext cx="2990748" cy="190500"/>
+              <a:t>Dedicated strategist</a:t>
+            </a:r>
+            <a:endParaRPr lang="en-US" sz="1200" dirty="0"/>
+          </a:p>
+        </p:txBody>
+      </p:sp>
+      <p:sp>
+        <p:nvSpPr>
+          <p:cNvPr id="14" name="Shape 11"/>
+          <p:cNvSpPr/>
+          <p:nvPr/>
+        </p:nvSpPr>
+        <p:spPr>
+          <a:xfrm>
+            <a:off x="762000" y="4267200"/>
+            <a:ext cx="57150" cy="57150"/>
+          </a:xfrm>
+          <a:prstGeom prst="ellipse">
+            <a:avLst/>
+          </a:prstGeom>
+          <a:solidFill>
+            <a:srgbClr val="E4022D"/>
+          </a:solidFill>
+          <a:ln w="12700">
+            <a:solidFill>
+              <a:srgbClr val="E4022D"/>
+            </a:solidFill>
+            <a:prstDash val="solid"/>
+          </a:ln>
+        </p:spPr>
+      </p:sp>
+      <p:sp>
+        <p:nvSpPr>
+          <p:cNvPr id="15" name="Text 12"/>
+          <p:cNvSpPr/>
+          <p:nvPr/>
+        </p:nvSpPr>
+        <p:spPr>
+          <a:xfrm>
+            <a:off x="895350" y="4191000"/>
+            <a:ext cx="3009798" cy="209550"/>
           </a:xfrm>
           <a:prstGeom prst="rect">
             <a:avLst/>
@@ -4229,7 +4279,7 @@
                 <a:ea typeface="DM Sans" pitchFamily="34" charset="-122"/>
                 <a:cs typeface="DM Sans" pitchFamily="34" charset="-120"/>
               </a:rPr>
-              <a:t>Dedicated strategist</a:t>
+              <a:t>Up to 2 workstreams</a:t>
             </a:r>
             <a:endParaRPr lang="en-US" sz="1200" dirty="0"/>
           </a:p>
@@ -4237,53 +4287,103 @@
       </p:sp>
       <p:sp>
         <p:nvSpPr>
-          <p:cNvPr id="14" name="Text 11"/>
-          <p:cNvSpPr/>
-          <p:nvPr/>
-        </p:nvSpPr>
-        <p:spPr>
-          <a:xfrm>
-            <a:off x="742950" y="4171950"/>
-            <a:ext cx="133350" cy="152400"/>
-          </a:xfrm>
-          <a:prstGeom prst="rect">
-            <a:avLst/>
-          </a:prstGeom>
-          <a:noFill/>
-          <a:ln/>
-        </p:spPr>
-        <p:txBody>
-          <a:bodyPr wrap="square" rtlCol="0" anchor="ctr"/>
-          <a:lstStyle/>
-          <a:p>
-            <a:pPr indent="0" marL="0">
-              <a:buNone/>
-            </a:pPr>
-            <a:r>
-              <a:rPr lang="en-US" sz="1100" b="1" dirty="0">
-                <a:solidFill>
-                  <a:srgbClr val="E4022D"/>
+          <p:cNvPr id="16" name="Shape 13"/>
+          <p:cNvSpPr/>
+          <p:nvPr/>
+        </p:nvSpPr>
+        <p:spPr>
+          <a:xfrm>
+            <a:off x="762000" y="4476750"/>
+            <a:ext cx="57150" cy="57150"/>
+          </a:xfrm>
+          <a:prstGeom prst="ellipse">
+            <a:avLst/>
+          </a:prstGeom>
+          <a:solidFill>
+            <a:srgbClr val="E4022D"/>
+          </a:solidFill>
+          <a:ln w="12700">
+            <a:solidFill>
+              <a:srgbClr val="E4022D"/>
+            </a:solidFill>
+            <a:prstDash val="solid"/>
+          </a:ln>
+        </p:spPr>
+      </p:sp>
+      <p:sp>
+        <p:nvSpPr>
+          <p:cNvPr id="17" name="Text 14"/>
+          <p:cNvSpPr/>
+          <p:nvPr/>
+        </p:nvSpPr>
+        <p:spPr>
+          <a:xfrm>
+            <a:off x="895350" y="4400550"/>
+            <a:ext cx="3009798" cy="209550"/>
+          </a:xfrm>
+          <a:prstGeom prst="rect">
+            <a:avLst/>
+          </a:prstGeom>
+          <a:noFill/>
+          <a:ln/>
+        </p:spPr>
+        <p:txBody>
+          <a:bodyPr wrap="square" rtlCol="0" anchor="ctr"/>
+          <a:lstStyle/>
+          <a:p>
+            <a:pPr indent="0" marL="0">
+              <a:buNone/>
+            </a:pPr>
+            <a:r>
+              <a:rPr lang="en-US" sz="1200" dirty="0">
+                <a:solidFill>
+                  <a:srgbClr val="0B0F14"/>
                 </a:solidFill>
                 <a:latin typeface="DM Sans" pitchFamily="34" charset="0"/>
                 <a:ea typeface="DM Sans" pitchFamily="34" charset="-122"/>
                 <a:cs typeface="DM Sans" pitchFamily="34" charset="-120"/>
               </a:rPr>
-              <a:t>✓</a:t>
-            </a:r>
-            <a:endParaRPr lang="en-US" sz="1100" dirty="0"/>
-          </a:p>
-        </p:txBody>
-      </p:sp>
-      <p:sp>
-        <p:nvSpPr>
-          <p:cNvPr id="15" name="Text 12"/>
-          <p:cNvSpPr/>
-          <p:nvPr/>
-        </p:nvSpPr>
-        <p:spPr>
-          <a:xfrm>
-            <a:off x="914400" y="4152900"/>
-            <a:ext cx="2990748" cy="190500"/>
+              <a:t>Bi-weekly reviews</a:t>
+            </a:r>
+            <a:endParaRPr lang="en-US" sz="1200" dirty="0"/>
+          </a:p>
+        </p:txBody>
+      </p:sp>
+      <p:sp>
+        <p:nvSpPr>
+          <p:cNvPr id="18" name="Shape 15"/>
+          <p:cNvSpPr/>
+          <p:nvPr/>
+        </p:nvSpPr>
+        <p:spPr>
+          <a:xfrm>
+            <a:off x="762000" y="4686300"/>
+            <a:ext cx="57150" cy="57150"/>
+          </a:xfrm>
+          <a:prstGeom prst="ellipse">
+            <a:avLst/>
+          </a:prstGeom>
+          <a:solidFill>
+            <a:srgbClr val="E4022D"/>
+          </a:solidFill>
+          <a:ln w="12700">
+            <a:solidFill>
+              <a:srgbClr val="E4022D"/>
+            </a:solidFill>
+            <a:prstDash val="solid"/>
+          </a:ln>
+        </p:spPr>
+      </p:sp>
+      <p:sp>
+        <p:nvSpPr>
+          <p:cNvPr id="19" name="Text 16"/>
+          <p:cNvSpPr/>
+          <p:nvPr/>
+        </p:nvSpPr>
+        <p:spPr>
+          <a:xfrm>
+            <a:off x="895350" y="4610100"/>
+            <a:ext cx="3009798" cy="209550"/>
           </a:xfrm>
           <a:prstGeom prst="rect">
             <a:avLst/>
@@ -4307,7 +4407,7 @@
                 <a:ea typeface="DM Sans" pitchFamily="34" charset="-122"/>
                 <a:cs typeface="DM Sans" pitchFamily="34" charset="-120"/>
               </a:rPr>
-              <a:t>Up to 2 workstreams</a:t>
+              <a:t>Shared delivery pod</a:t>
             </a:r>
             <a:endParaRPr lang="en-US" sz="1200" dirty="0"/>
           </a:p>
@@ -4315,198 +4415,28 @@
       </p:sp>
       <p:sp>
         <p:nvSpPr>
-          <p:cNvPr id="16" name="Text 13"/>
-          <p:cNvSpPr/>
-          <p:nvPr/>
-        </p:nvSpPr>
-        <p:spPr>
-          <a:xfrm>
-            <a:off x="742950" y="4362450"/>
-            <a:ext cx="133350" cy="152400"/>
-          </a:xfrm>
-          <a:prstGeom prst="rect">
-            <a:avLst/>
-          </a:prstGeom>
-          <a:noFill/>
-          <a:ln/>
-        </p:spPr>
-        <p:txBody>
-          <a:bodyPr wrap="square" rtlCol="0" anchor="ctr"/>
-          <a:lstStyle/>
-          <a:p>
-            <a:pPr indent="0" marL="0">
-              <a:buNone/>
-            </a:pPr>
-            <a:r>
-              <a:rPr lang="en-US" sz="1100" b="1" dirty="0">
-                <a:solidFill>
-                  <a:srgbClr val="E4022D"/>
-                </a:solidFill>
-                <a:latin typeface="DM Sans" pitchFamily="34" charset="0"/>
-                <a:ea typeface="DM Sans" pitchFamily="34" charset="-122"/>
-                <a:cs typeface="DM Sans" pitchFamily="34" charset="-120"/>
-              </a:rPr>
-              <a:t>✓</a:t>
-            </a:r>
-            <a:endParaRPr lang="en-US" sz="1100" dirty="0"/>
-          </a:p>
-        </p:txBody>
-      </p:sp>
-      <p:sp>
-        <p:nvSpPr>
-          <p:cNvPr id="17" name="Text 14"/>
-          <p:cNvSpPr/>
-          <p:nvPr/>
-        </p:nvSpPr>
-        <p:spPr>
-          <a:xfrm>
-            <a:off x="914400" y="4343400"/>
-            <a:ext cx="2990748" cy="190500"/>
-          </a:xfrm>
-          <a:prstGeom prst="rect">
-            <a:avLst/>
-          </a:prstGeom>
-          <a:noFill/>
-          <a:ln/>
-        </p:spPr>
-        <p:txBody>
-          <a:bodyPr wrap="square" rtlCol="0" anchor="ctr"/>
-          <a:lstStyle/>
-          <a:p>
-            <a:pPr indent="0" marL="0">
-              <a:buNone/>
-            </a:pPr>
-            <a:r>
-              <a:rPr lang="en-US" sz="1200" dirty="0">
-                <a:solidFill>
-                  <a:srgbClr val="0B0F14"/>
-                </a:solidFill>
-                <a:latin typeface="DM Sans" pitchFamily="34" charset="0"/>
-                <a:ea typeface="DM Sans" pitchFamily="34" charset="-122"/>
-                <a:cs typeface="DM Sans" pitchFamily="34" charset="-120"/>
-              </a:rPr>
-              <a:t>Bi-weekly reviews</a:t>
-            </a:r>
-            <a:endParaRPr lang="en-US" sz="1200" dirty="0"/>
-          </a:p>
-        </p:txBody>
-      </p:sp>
-      <p:sp>
-        <p:nvSpPr>
-          <p:cNvPr id="18" name="Text 15"/>
-          <p:cNvSpPr/>
-          <p:nvPr/>
-        </p:nvSpPr>
-        <p:spPr>
-          <a:xfrm>
-            <a:off x="742950" y="4552950"/>
-            <a:ext cx="133350" cy="152400"/>
-          </a:xfrm>
-          <a:prstGeom prst="rect">
-            <a:avLst/>
-          </a:prstGeom>
-          <a:noFill/>
-          <a:ln/>
-        </p:spPr>
-        <p:txBody>
-          <a:bodyPr wrap="square" rtlCol="0" anchor="ctr"/>
-          <a:lstStyle/>
-          <a:p>
-            <a:pPr indent="0" marL="0">
-              <a:buNone/>
-            </a:pPr>
-            <a:r>
-              <a:rPr lang="en-US" sz="1100" b="1" dirty="0">
-                <a:solidFill>
-                  <a:srgbClr val="E4022D"/>
-                </a:solidFill>
-                <a:latin typeface="DM Sans" pitchFamily="34" charset="0"/>
-                <a:ea typeface="DM Sans" pitchFamily="34" charset="-122"/>
-                <a:cs typeface="DM Sans" pitchFamily="34" charset="-120"/>
-              </a:rPr>
-              <a:t>✓</a:t>
-            </a:r>
-            <a:endParaRPr lang="en-US" sz="1100" dirty="0"/>
-          </a:p>
-        </p:txBody>
-      </p:sp>
-      <p:sp>
-        <p:nvSpPr>
-          <p:cNvPr id="19" name="Text 16"/>
-          <p:cNvSpPr/>
-          <p:nvPr/>
-        </p:nvSpPr>
-        <p:spPr>
-          <a:xfrm>
-            <a:off x="914400" y="4533900"/>
-            <a:ext cx="2990748" cy="190500"/>
-          </a:xfrm>
-          <a:prstGeom prst="rect">
-            <a:avLst/>
-          </a:prstGeom>
-          <a:noFill/>
-          <a:ln/>
-        </p:spPr>
-        <p:txBody>
-          <a:bodyPr wrap="square" rtlCol="0" anchor="ctr"/>
-          <a:lstStyle/>
-          <a:p>
-            <a:pPr indent="0" marL="0">
-              <a:buNone/>
-            </a:pPr>
-            <a:r>
-              <a:rPr lang="en-US" sz="1200" dirty="0">
-                <a:solidFill>
-                  <a:srgbClr val="0B0F14"/>
-                </a:solidFill>
-                <a:latin typeface="DM Sans" pitchFamily="34" charset="0"/>
-                <a:ea typeface="DM Sans" pitchFamily="34" charset="-122"/>
-                <a:cs typeface="DM Sans" pitchFamily="34" charset="-120"/>
-              </a:rPr>
-              <a:t>Shared delivery pod</a:t>
-            </a:r>
-            <a:endParaRPr lang="en-US" sz="1200" dirty="0"/>
-          </a:p>
-        </p:txBody>
-      </p:sp>
-      <p:sp>
-        <p:nvSpPr>
-          <p:cNvPr id="20" name="Text 17"/>
-          <p:cNvSpPr/>
-          <p:nvPr/>
-        </p:nvSpPr>
-        <p:spPr>
-          <a:xfrm>
-            <a:off x="742950" y="4743450"/>
-            <a:ext cx="133350" cy="152400"/>
-          </a:xfrm>
-          <a:prstGeom prst="rect">
-            <a:avLst/>
-          </a:prstGeom>
-          <a:noFill/>
-          <a:ln/>
-        </p:spPr>
-        <p:txBody>
-          <a:bodyPr wrap="square" rtlCol="0" anchor="ctr"/>
-          <a:lstStyle/>
-          <a:p>
-            <a:pPr indent="0" marL="0">
-              <a:buNone/>
-            </a:pPr>
-            <a:r>
-              <a:rPr lang="en-US" sz="1100" b="1" dirty="0">
-                <a:solidFill>
-                  <a:srgbClr val="E4022D"/>
-                </a:solidFill>
-                <a:latin typeface="DM Sans" pitchFamily="34" charset="0"/>
-                <a:ea typeface="DM Sans" pitchFamily="34" charset="-122"/>
-                <a:cs typeface="DM Sans" pitchFamily="34" charset="-120"/>
-              </a:rPr>
-              <a:t>✓</a:t>
-            </a:r>
-            <a:endParaRPr lang="en-US" sz="1100" dirty="0"/>
-          </a:p>
-        </p:txBody>
+          <p:cNvPr id="20" name="Shape 17"/>
+          <p:cNvSpPr/>
+          <p:nvPr/>
+        </p:nvSpPr>
+        <p:spPr>
+          <a:xfrm>
+            <a:off x="762000" y="4895850"/>
+            <a:ext cx="57150" cy="57150"/>
+          </a:xfrm>
+          <a:prstGeom prst="ellipse">
+            <a:avLst/>
+          </a:prstGeom>
+          <a:solidFill>
+            <a:srgbClr val="E4022D"/>
+          </a:solidFill>
+          <a:ln w="12700">
+            <a:solidFill>
+              <a:srgbClr val="E4022D"/>
+            </a:solidFill>
+            <a:prstDash val="solid"/>
+          </a:ln>
+        </p:spPr>
       </p:sp>
       <p:sp>
         <p:nvSpPr>
@@ -4516,8 +4446,8 @@
         </p:nvSpPr>
         <p:spPr>
           <a:xfrm>
-            <a:off x="914400" y="4724400"/>
-            <a:ext cx="2990748" cy="190500"/>
+            <a:off x="895350" y="4819650"/>
+            <a:ext cx="3009798" cy="209550"/>
           </a:xfrm>
           <a:prstGeom prst="rect">
             <a:avLst/>
@@ -4648,13 +4578,231 @@
         </p:nvSpPr>
         <p:spPr>
           <a:xfrm>
-            <a:off x="4514748" y="2400300"/>
-            <a:ext cx="1123950" cy="209550"/>
+            <a:off x="4514748" y="2362200"/>
+            <a:ext cx="1428750" cy="247650"/>
           </a:xfrm>
           <a:prstGeom prst="roundRect">
             <a:avLst>
-              <a:gd name="adj" fmla="val 52364"/>
+              <a:gd name="adj" fmla="val 48000"/>
             </a:avLst>
+          </a:prstGeom>
+          <a:solidFill>
+            <a:srgbClr val="E4022D"/>
+          </a:solidFill>
+          <a:ln w="25400">
+            <a:solidFill>
+              <a:srgbClr val="FFFFFF"/>
+            </a:solidFill>
+            <a:prstDash val="solid"/>
+          </a:ln>
+        </p:spPr>
+      </p:sp>
+      <p:sp>
+        <p:nvSpPr>
+          <p:cNvPr id="26" name="Text 23"/>
+          <p:cNvSpPr/>
+          <p:nvPr/>
+        </p:nvSpPr>
+        <p:spPr>
+          <a:xfrm>
+            <a:off x="4514748" y="2362200"/>
+            <a:ext cx="1428750" cy="247650"/>
+          </a:xfrm>
+          <a:prstGeom prst="rect">
+            <a:avLst/>
+          </a:prstGeom>
+          <a:noFill/>
+          <a:ln/>
+        </p:spPr>
+        <p:txBody>
+          <a:bodyPr wrap="square" rtlCol="0" anchor="ctr"/>
+          <a:lstStyle/>
+          <a:p>
+            <a:pPr algn="ctr" indent="0" marL="0">
+              <a:buNone/>
+            </a:pPr>
+            <a:r>
+              <a:rPr lang="en-US" sz="900" b="1" spc="200" kern="0" dirty="0">
+                <a:solidFill>
+                  <a:srgbClr val="FFFFFF"/>
+                </a:solidFill>
+                <a:latin typeface="JetBrains Mono" pitchFamily="34" charset="0"/>
+                <a:ea typeface="JetBrains Mono" pitchFamily="34" charset="-122"/>
+                <a:cs typeface="JetBrains Mono" pitchFamily="34" charset="-120"/>
+              </a:rPr>
+              <a:t>MOST PARTNERS</a:t>
+            </a:r>
+            <a:endParaRPr lang="en-US" sz="900" dirty="0"/>
+          </a:p>
+        </p:txBody>
+      </p:sp>
+      <p:sp>
+        <p:nvSpPr>
+          <p:cNvPr id="27" name="Text 24"/>
+          <p:cNvSpPr/>
+          <p:nvPr/>
+        </p:nvSpPr>
+        <p:spPr>
+          <a:xfrm>
+            <a:off x="4514748" y="2705100"/>
+            <a:ext cx="3162198" cy="228600"/>
+          </a:xfrm>
+          <a:prstGeom prst="rect">
+            <a:avLst/>
+          </a:prstGeom>
+          <a:noFill/>
+          <a:ln/>
+        </p:spPr>
+        <p:txBody>
+          <a:bodyPr wrap="square" rtlCol="0" anchor="ctr"/>
+          <a:lstStyle/>
+          <a:p>
+            <a:pPr indent="0" marL="0">
+              <a:buNone/>
+            </a:pPr>
+            <a:r>
+              <a:rPr lang="en-US" sz="2000" spc="-30" kern="0" dirty="0">
+                <a:solidFill>
+                  <a:srgbClr val="0B0F14"/>
+                </a:solidFill>
+                <a:latin typeface="Newsreader" pitchFamily="34" charset="0"/>
+                <a:ea typeface="Newsreader" pitchFamily="34" charset="-122"/>
+                <a:cs typeface="Newsreader" pitchFamily="34" charset="-120"/>
+              </a:rPr>
+              <a:t>Partnership</a:t>
+            </a:r>
+            <a:endParaRPr lang="en-US" sz="2000" dirty="0"/>
+          </a:p>
+        </p:txBody>
+      </p:sp>
+      <p:sp>
+        <p:nvSpPr>
+          <p:cNvPr id="28" name="Text 25"/>
+          <p:cNvSpPr/>
+          <p:nvPr/>
+        </p:nvSpPr>
+        <p:spPr>
+          <a:xfrm>
+            <a:off x="4514748" y="3009900"/>
+            <a:ext cx="3162198" cy="609600"/>
+          </a:xfrm>
+          <a:prstGeom prst="rect">
+            <a:avLst/>
+          </a:prstGeom>
+          <a:noFill/>
+          <a:ln/>
+        </p:spPr>
+        <p:txBody>
+          <a:bodyPr wrap="square" rtlCol="0" anchor="ctr"/>
+          <a:lstStyle/>
+          <a:p>
+            <a:pPr indent="0" marL="0">
+              <a:buNone/>
+            </a:pPr>
+            <a:r>
+              <a:rPr lang="en-US" sz="4600" spc="-150" kern="0" dirty="0">
+                <a:solidFill>
+                  <a:srgbClr val="0B0F14"/>
+                </a:solidFill>
+                <a:latin typeface="Newsreader" pitchFamily="34" charset="0"/>
+                <a:ea typeface="Newsreader" pitchFamily="34" charset="-122"/>
+                <a:cs typeface="Newsreader" pitchFamily="34" charset="-120"/>
+              </a:rPr>
+              <a:t>28k</a:t>
+            </a:r>
+            <a:pPr indent="0" marL="0">
+              <a:buNone/>
+            </a:pPr>
+            <a:r>
+              <a:rPr lang="en-US" sz="1300" baseline="30000" spc="-150" kern="0" dirty="0">
+                <a:solidFill>
+                  <a:srgbClr val="5B6573"/>
+                </a:solidFill>
+                <a:latin typeface="Newsreader" pitchFamily="34" charset="0"/>
+                <a:ea typeface="Newsreader" pitchFamily="34" charset="-122"/>
+                <a:cs typeface="Newsreader" pitchFamily="34" charset="-120"/>
+              </a:rPr>
+              <a:t>/mo</a:t>
+            </a:r>
+            <a:endParaRPr lang="en-US" sz="4600" dirty="0"/>
+          </a:p>
+        </p:txBody>
+      </p:sp>
+      <p:sp>
+        <p:nvSpPr>
+          <p:cNvPr id="29" name="Text 26"/>
+          <p:cNvSpPr/>
+          <p:nvPr/>
+        </p:nvSpPr>
+        <p:spPr>
+          <a:xfrm>
+            <a:off x="4514748" y="3619500"/>
+            <a:ext cx="3162198" cy="171450"/>
+          </a:xfrm>
+          <a:prstGeom prst="rect">
+            <a:avLst/>
+          </a:prstGeom>
+          <a:noFill/>
+          <a:ln/>
+        </p:spPr>
+        <p:txBody>
+          <a:bodyPr wrap="square" rtlCol="0" anchor="ctr"/>
+          <a:lstStyle/>
+          <a:p>
+            <a:pPr indent="0" marL="0">
+              <a:buNone/>
+            </a:pPr>
+            <a:r>
+              <a:rPr lang="en-US" sz="1100" spc="50" kern="0" dirty="0">
+                <a:solidFill>
+                  <a:srgbClr val="5B6573"/>
+                </a:solidFill>
+                <a:latin typeface="DM Sans" pitchFamily="34" charset="0"/>
+                <a:ea typeface="DM Sans" pitchFamily="34" charset="-122"/>
+                <a:cs typeface="DM Sans" pitchFamily="34" charset="-120"/>
+              </a:rPr>
+              <a:t>Full team embedded</a:t>
+            </a:r>
+            <a:endParaRPr lang="en-US" sz="1100" dirty="0"/>
+          </a:p>
+        </p:txBody>
+      </p:sp>
+      <p:sp>
+        <p:nvSpPr>
+          <p:cNvPr id="30" name="Shape 27"/>
+          <p:cNvSpPr/>
+          <p:nvPr/>
+        </p:nvSpPr>
+        <p:spPr>
+          <a:xfrm>
+            <a:off x="4514748" y="3886200"/>
+            <a:ext cx="3162198" cy="0"/>
+          </a:xfrm>
+          <a:prstGeom prst="line">
+            <a:avLst/>
+          </a:prstGeom>
+          <a:noFill/>
+          <a:ln w="12700">
+            <a:solidFill>
+              <a:srgbClr val="E2DED6"/>
+            </a:solidFill>
+            <a:prstDash val="solid"/>
+          </a:ln>
+        </p:spPr>
+      </p:sp>
+      <p:sp>
+        <p:nvSpPr>
+          <p:cNvPr id="31" name="Shape 28"/>
+          <p:cNvSpPr/>
+          <p:nvPr/>
+        </p:nvSpPr>
+        <p:spPr>
+          <a:xfrm>
+            <a:off x="4533798" y="4057650"/>
+            <a:ext cx="57150" cy="57150"/>
+          </a:xfrm>
+          <a:prstGeom prst="ellipse">
+            <a:avLst/>
           </a:prstGeom>
           <a:solidFill>
             <a:srgbClr val="E4022D"/>
@@ -4669,192 +4817,63 @@
       </p:sp>
       <p:sp>
         <p:nvSpPr>
-          <p:cNvPr id="26" name="Text 23"/>
-          <p:cNvSpPr/>
-          <p:nvPr/>
-        </p:nvSpPr>
-        <p:spPr>
-          <a:xfrm>
-            <a:off x="4514748" y="2400300"/>
-            <a:ext cx="1123950" cy="209550"/>
-          </a:xfrm>
-          <a:prstGeom prst="rect">
-            <a:avLst/>
-          </a:prstGeom>
-          <a:noFill/>
-          <a:ln/>
-        </p:spPr>
-        <p:txBody>
-          <a:bodyPr wrap="square" rtlCol="0" anchor="ctr"/>
-          <a:lstStyle/>
-          <a:p>
-            <a:pPr algn="ctr" indent="0" marL="0">
-              <a:buNone/>
-            </a:pPr>
-            <a:r>
-              <a:rPr lang="en-US" sz="900" b="1" spc="200" kern="0" dirty="0">
-                <a:solidFill>
-                  <a:srgbClr val="FFFFFF"/>
-                </a:solidFill>
-                <a:latin typeface="JetBrains Mono" pitchFamily="34" charset="0"/>
-                <a:ea typeface="JetBrains Mono" pitchFamily="34" charset="-122"/>
-                <a:cs typeface="JetBrains Mono" pitchFamily="34" charset="-120"/>
-              </a:rPr>
-              <a:t>MOST PARTNERS</a:t>
-            </a:r>
-            <a:endParaRPr lang="en-US" sz="900" dirty="0"/>
-          </a:p>
-        </p:txBody>
-      </p:sp>
-      <p:sp>
-        <p:nvSpPr>
-          <p:cNvPr id="27" name="Text 24"/>
-          <p:cNvSpPr/>
-          <p:nvPr/>
-        </p:nvSpPr>
-        <p:spPr>
-          <a:xfrm>
-            <a:off x="4514748" y="2705100"/>
-            <a:ext cx="3162198" cy="228600"/>
-          </a:xfrm>
-          <a:prstGeom prst="rect">
-            <a:avLst/>
-          </a:prstGeom>
-          <a:noFill/>
-          <a:ln/>
-        </p:spPr>
-        <p:txBody>
-          <a:bodyPr wrap="square" rtlCol="0" anchor="ctr"/>
-          <a:lstStyle/>
-          <a:p>
-            <a:pPr indent="0" marL="0">
-              <a:buNone/>
-            </a:pPr>
-            <a:r>
-              <a:rPr lang="en-US" sz="2000" spc="-30" kern="0" dirty="0">
+          <p:cNvPr id="32" name="Text 29"/>
+          <p:cNvSpPr/>
+          <p:nvPr/>
+        </p:nvSpPr>
+        <p:spPr>
+          <a:xfrm>
+            <a:off x="4667148" y="3981450"/>
+            <a:ext cx="3009798" cy="209550"/>
+          </a:xfrm>
+          <a:prstGeom prst="rect">
+            <a:avLst/>
+          </a:prstGeom>
+          <a:noFill/>
+          <a:ln/>
+        </p:spPr>
+        <p:txBody>
+          <a:bodyPr wrap="square" rtlCol="0" anchor="ctr"/>
+          <a:lstStyle/>
+          <a:p>
+            <a:pPr indent="0" marL="0">
+              <a:buNone/>
+            </a:pPr>
+            <a:r>
+              <a:rPr lang="en-US" sz="1200" dirty="0">
                 <a:solidFill>
                   <a:srgbClr val="0B0F14"/>
-                </a:solidFill>
-                <a:latin typeface="Newsreader" pitchFamily="34" charset="0"/>
-                <a:ea typeface="Newsreader" pitchFamily="34" charset="-122"/>
-                <a:cs typeface="Newsreader" pitchFamily="34" charset="-120"/>
-              </a:rPr>
-              <a:t>Partnership</a:t>
-            </a:r>
-            <a:endParaRPr lang="en-US" sz="2000" dirty="0"/>
-          </a:p>
-        </p:txBody>
-      </p:sp>
-      <p:sp>
-        <p:nvSpPr>
-          <p:cNvPr id="28" name="Text 25"/>
-          <p:cNvSpPr/>
-          <p:nvPr/>
-        </p:nvSpPr>
-        <p:spPr>
-          <a:xfrm>
-            <a:off x="4514748" y="3009900"/>
-            <a:ext cx="3162198" cy="609600"/>
-          </a:xfrm>
-          <a:prstGeom prst="rect">
-            <a:avLst/>
-          </a:prstGeom>
-          <a:noFill/>
-          <a:ln/>
-        </p:spPr>
-        <p:txBody>
-          <a:bodyPr wrap="square" rtlCol="0" anchor="ctr"/>
-          <a:lstStyle/>
-          <a:p>
-            <a:pPr indent="0" marL="0">
-              <a:buNone/>
-            </a:pPr>
-            <a:r>
-              <a:rPr lang="en-US" sz="4600" spc="-150" kern="0" dirty="0">
-                <a:solidFill>
-                  <a:srgbClr val="0B0F14"/>
-                </a:solidFill>
-                <a:latin typeface="Newsreader" pitchFamily="34" charset="0"/>
-                <a:ea typeface="Newsreader" pitchFamily="34" charset="-122"/>
-                <a:cs typeface="Newsreader" pitchFamily="34" charset="-120"/>
-              </a:rPr>
-              <a:t>28k</a:t>
-            </a:r>
-            <a:pPr indent="0" marL="0">
-              <a:buNone/>
-            </a:pPr>
-            <a:r>
-              <a:rPr lang="en-US" sz="1300" baseline="30000" spc="-150" kern="0" dirty="0">
-                <a:solidFill>
-                  <a:srgbClr val="5B6573"/>
-                </a:solidFill>
-                <a:latin typeface="Newsreader" pitchFamily="34" charset="0"/>
-                <a:ea typeface="Newsreader" pitchFamily="34" charset="-122"/>
-                <a:cs typeface="Newsreader" pitchFamily="34" charset="-120"/>
-              </a:rPr>
-              <a:t>/mo</a:t>
-            </a:r>
-            <a:endParaRPr lang="en-US" sz="4600" dirty="0"/>
-          </a:p>
-        </p:txBody>
-      </p:sp>
-      <p:sp>
-        <p:nvSpPr>
-          <p:cNvPr id="29" name="Text 26"/>
-          <p:cNvSpPr/>
-          <p:nvPr/>
-        </p:nvSpPr>
-        <p:spPr>
-          <a:xfrm>
-            <a:off x="4514748" y="3619500"/>
-            <a:ext cx="3162198" cy="171450"/>
-          </a:xfrm>
-          <a:prstGeom prst="rect">
-            <a:avLst/>
-          </a:prstGeom>
-          <a:noFill/>
-          <a:ln/>
-        </p:spPr>
-        <p:txBody>
-          <a:bodyPr wrap="square" rtlCol="0" anchor="ctr"/>
-          <a:lstStyle/>
-          <a:p>
-            <a:pPr indent="0" marL="0">
-              <a:buNone/>
-            </a:pPr>
-            <a:r>
-              <a:rPr lang="en-US" sz="1100" spc="50" kern="0" dirty="0">
-                <a:solidFill>
-                  <a:srgbClr val="5B6573"/>
                 </a:solidFill>
                 <a:latin typeface="DM Sans" pitchFamily="34" charset="0"/>
                 <a:ea typeface="DM Sans" pitchFamily="34" charset="-122"/>
                 <a:cs typeface="DM Sans" pitchFamily="34" charset="-120"/>
               </a:rPr>
-              <a:t>Full team embedded</a:t>
-            </a:r>
-            <a:endParaRPr lang="en-US" sz="1100" dirty="0"/>
-          </a:p>
-        </p:txBody>
-      </p:sp>
-      <p:sp>
-        <p:nvSpPr>
-          <p:cNvPr id="30" name="Shape 27"/>
-          <p:cNvSpPr/>
-          <p:nvPr/>
-        </p:nvSpPr>
-        <p:spPr>
-          <a:xfrm>
-            <a:off x="4514748" y="3886200"/>
-            <a:ext cx="3162198" cy="0"/>
-          </a:xfrm>
-          <a:prstGeom prst="line">
-            <a:avLst/>
-          </a:prstGeom>
-          <a:noFill/>
+              <a:t>Partnership lead + pod</a:t>
+            </a:r>
+            <a:endParaRPr lang="en-US" sz="1200" dirty="0"/>
+          </a:p>
+        </p:txBody>
+      </p:sp>
+      <p:sp>
+        <p:nvSpPr>
+          <p:cNvPr id="33" name="Shape 30"/>
+          <p:cNvSpPr/>
+          <p:nvPr/>
+        </p:nvSpPr>
+        <p:spPr>
+          <a:xfrm>
+            <a:off x="4533798" y="4267200"/>
+            <a:ext cx="57150" cy="57150"/>
+          </a:xfrm>
+          <a:prstGeom prst="ellipse">
+            <a:avLst/>
+          </a:prstGeom>
+          <a:solidFill>
+            <a:srgbClr val="E4022D"/>
+          </a:solidFill>
           <a:ln w="12700">
             <a:solidFill>
-              <a:srgbClr val="E2DED6"/>
+              <a:srgbClr val="E4022D"/>
             </a:solidFill>
             <a:prstDash val="solid"/>
           </a:ln>
@@ -4862,53 +4881,78 @@
       </p:sp>
       <p:sp>
         <p:nvSpPr>
-          <p:cNvPr id="31" name="Text 28"/>
-          <p:cNvSpPr/>
-          <p:nvPr/>
-        </p:nvSpPr>
-        <p:spPr>
-          <a:xfrm>
-            <a:off x="4514748" y="3981450"/>
-            <a:ext cx="133350" cy="152400"/>
-          </a:xfrm>
-          <a:prstGeom prst="rect">
-            <a:avLst/>
-          </a:prstGeom>
-          <a:noFill/>
-          <a:ln/>
-        </p:spPr>
-        <p:txBody>
-          <a:bodyPr wrap="square" rtlCol="0" anchor="ctr"/>
-          <a:lstStyle/>
-          <a:p>
-            <a:pPr indent="0" marL="0">
-              <a:buNone/>
-            </a:pPr>
-            <a:r>
-              <a:rPr lang="en-US" sz="1100" b="1" dirty="0">
-                <a:solidFill>
-                  <a:srgbClr val="E4022D"/>
+          <p:cNvPr id="34" name="Text 31"/>
+          <p:cNvSpPr/>
+          <p:nvPr/>
+        </p:nvSpPr>
+        <p:spPr>
+          <a:xfrm>
+            <a:off x="4667148" y="4191000"/>
+            <a:ext cx="3009798" cy="209550"/>
+          </a:xfrm>
+          <a:prstGeom prst="rect">
+            <a:avLst/>
+          </a:prstGeom>
+          <a:noFill/>
+          <a:ln/>
+        </p:spPr>
+        <p:txBody>
+          <a:bodyPr wrap="square" rtlCol="0" anchor="ctr"/>
+          <a:lstStyle/>
+          <a:p>
+            <a:pPr indent="0" marL="0">
+              <a:buNone/>
+            </a:pPr>
+            <a:r>
+              <a:rPr lang="en-US" sz="1200" dirty="0">
+                <a:solidFill>
+                  <a:srgbClr val="0B0F14"/>
                 </a:solidFill>
                 <a:latin typeface="DM Sans" pitchFamily="34" charset="0"/>
                 <a:ea typeface="DM Sans" pitchFamily="34" charset="-122"/>
                 <a:cs typeface="DM Sans" pitchFamily="34" charset="-120"/>
               </a:rPr>
-              <a:t>✓</a:t>
-            </a:r>
-            <a:endParaRPr lang="en-US" sz="1100" dirty="0"/>
-          </a:p>
-        </p:txBody>
-      </p:sp>
-      <p:sp>
-        <p:nvSpPr>
-          <p:cNvPr id="32" name="Text 29"/>
-          <p:cNvSpPr/>
-          <p:nvPr/>
-        </p:nvSpPr>
-        <p:spPr>
-          <a:xfrm>
-            <a:off x="4686198" y="3962400"/>
-            <a:ext cx="2990748" cy="190500"/>
+              <a:t>Unlimited workstreams</a:t>
+            </a:r>
+            <a:endParaRPr lang="en-US" sz="1200" dirty="0"/>
+          </a:p>
+        </p:txBody>
+      </p:sp>
+      <p:sp>
+        <p:nvSpPr>
+          <p:cNvPr id="35" name="Shape 32"/>
+          <p:cNvSpPr/>
+          <p:nvPr/>
+        </p:nvSpPr>
+        <p:spPr>
+          <a:xfrm>
+            <a:off x="4533798" y="4476750"/>
+            <a:ext cx="57150" cy="57150"/>
+          </a:xfrm>
+          <a:prstGeom prst="ellipse">
+            <a:avLst/>
+          </a:prstGeom>
+          <a:solidFill>
+            <a:srgbClr val="E4022D"/>
+          </a:solidFill>
+          <a:ln w="12700">
+            <a:solidFill>
+              <a:srgbClr val="E4022D"/>
+            </a:solidFill>
+            <a:prstDash val="solid"/>
+          </a:ln>
+        </p:spPr>
+      </p:sp>
+      <p:sp>
+        <p:nvSpPr>
+          <p:cNvPr id="36" name="Text 33"/>
+          <p:cNvSpPr/>
+          <p:nvPr/>
+        </p:nvSpPr>
+        <p:spPr>
+          <a:xfrm>
+            <a:off x="4667148" y="4400550"/>
+            <a:ext cx="3009798" cy="209550"/>
           </a:xfrm>
           <a:prstGeom prst="rect">
             <a:avLst/>
@@ -4932,7 +4976,7 @@
                 <a:ea typeface="DM Sans" pitchFamily="34" charset="-122"/>
                 <a:cs typeface="DM Sans" pitchFamily="34" charset="-120"/>
               </a:rPr>
-              <a:t>Partnership lead + pod</a:t>
+              <a:t>Weekly operating cadence</a:t>
             </a:r>
             <a:endParaRPr lang="en-US" sz="1200" dirty="0"/>
           </a:p>
@@ -4940,77 +4984,63 @@
       </p:sp>
       <p:sp>
         <p:nvSpPr>
-          <p:cNvPr id="33" name="Text 30"/>
-          <p:cNvSpPr/>
-          <p:nvPr/>
-        </p:nvSpPr>
-        <p:spPr>
-          <a:xfrm>
-            <a:off x="4514748" y="4171950"/>
-            <a:ext cx="133350" cy="152400"/>
-          </a:xfrm>
-          <a:prstGeom prst="rect">
-            <a:avLst/>
-          </a:prstGeom>
-          <a:noFill/>
-          <a:ln/>
-        </p:spPr>
-        <p:txBody>
-          <a:bodyPr wrap="square" rtlCol="0" anchor="ctr"/>
-          <a:lstStyle/>
-          <a:p>
-            <a:pPr indent="0" marL="0">
-              <a:buNone/>
-            </a:pPr>
-            <a:r>
-              <a:rPr lang="en-US" sz="1100" b="1" dirty="0">
-                <a:solidFill>
-                  <a:srgbClr val="E4022D"/>
+          <p:cNvPr id="37" name="Shape 34"/>
+          <p:cNvSpPr/>
+          <p:nvPr/>
+        </p:nvSpPr>
+        <p:spPr>
+          <a:xfrm>
+            <a:off x="4533798" y="4686300"/>
+            <a:ext cx="57150" cy="57150"/>
+          </a:xfrm>
+          <a:prstGeom prst="ellipse">
+            <a:avLst/>
+          </a:prstGeom>
+          <a:solidFill>
+            <a:srgbClr val="E4022D"/>
+          </a:solidFill>
+          <a:ln w="12700">
+            <a:solidFill>
+              <a:srgbClr val="E4022D"/>
+            </a:solidFill>
+            <a:prstDash val="solid"/>
+          </a:ln>
+        </p:spPr>
+      </p:sp>
+      <p:sp>
+        <p:nvSpPr>
+          <p:cNvPr id="38" name="Text 35"/>
+          <p:cNvSpPr/>
+          <p:nvPr/>
+        </p:nvSpPr>
+        <p:spPr>
+          <a:xfrm>
+            <a:off x="4667148" y="4610100"/>
+            <a:ext cx="3009798" cy="209550"/>
+          </a:xfrm>
+          <a:prstGeom prst="rect">
+            <a:avLst/>
+          </a:prstGeom>
+          <a:noFill/>
+          <a:ln/>
+        </p:spPr>
+        <p:txBody>
+          <a:bodyPr wrap="square" rtlCol="0" anchor="ctr"/>
+          <a:lstStyle/>
+          <a:p>
+            <a:pPr indent="0" marL="0">
+              <a:buNone/>
+            </a:pPr>
+            <a:r>
+              <a:rPr lang="en-US" sz="1200" dirty="0">
+                <a:solidFill>
+                  <a:srgbClr val="0B0F14"/>
                 </a:solidFill>
                 <a:latin typeface="DM Sans" pitchFamily="34" charset="0"/>
                 <a:ea typeface="DM Sans" pitchFamily="34" charset="-122"/>
                 <a:cs typeface="DM Sans" pitchFamily="34" charset="-120"/>
               </a:rPr>
-              <a:t>✓</a:t>
-            </a:r>
-            <a:endParaRPr lang="en-US" sz="1100" dirty="0"/>
-          </a:p>
-        </p:txBody>
-      </p:sp>
-      <p:sp>
-        <p:nvSpPr>
-          <p:cNvPr id="34" name="Text 31"/>
-          <p:cNvSpPr/>
-          <p:nvPr/>
-        </p:nvSpPr>
-        <p:spPr>
-          <a:xfrm>
-            <a:off x="4686198" y="4152900"/>
-            <a:ext cx="2990748" cy="190500"/>
-          </a:xfrm>
-          <a:prstGeom prst="rect">
-            <a:avLst/>
-          </a:prstGeom>
-          <a:noFill/>
-          <a:ln/>
-        </p:spPr>
-        <p:txBody>
-          <a:bodyPr wrap="square" rtlCol="0" anchor="ctr"/>
-          <a:lstStyle/>
-          <a:p>
-            <a:pPr indent="0" marL="0">
-              <a:buNone/>
-            </a:pPr>
-            <a:r>
-              <a:rPr lang="en-US" sz="1200" dirty="0">
-                <a:solidFill>
-                  <a:srgbClr val="0B0F14"/>
-                </a:solidFill>
-                <a:latin typeface="DM Sans" pitchFamily="34" charset="0"/>
-                <a:ea typeface="DM Sans" pitchFamily="34" charset="-122"/>
-                <a:cs typeface="DM Sans" pitchFamily="34" charset="-120"/>
-              </a:rPr>
-              <a:t>Unlimited workstreams</a:t>
+              <a:t>Full design + engineering</a:t>
             </a:r>
             <a:endParaRPr lang="en-US" sz="1200" dirty="0"/>
           </a:p>
@@ -5018,198 +5048,28 @@
       </p:sp>
       <p:sp>
         <p:nvSpPr>
-          <p:cNvPr id="35" name="Text 32"/>
-          <p:cNvSpPr/>
-          <p:nvPr/>
-        </p:nvSpPr>
-        <p:spPr>
-          <a:xfrm>
-            <a:off x="4514748" y="4362450"/>
-            <a:ext cx="133350" cy="152400"/>
-          </a:xfrm>
-          <a:prstGeom prst="rect">
-            <a:avLst/>
-          </a:prstGeom>
-          <a:noFill/>
-          <a:ln/>
-        </p:spPr>
-        <p:txBody>
-          <a:bodyPr wrap="square" rtlCol="0" anchor="ctr"/>
-          <a:lstStyle/>
-          <a:p>
-            <a:pPr indent="0" marL="0">
-              <a:buNone/>
-            </a:pPr>
-            <a:r>
-              <a:rPr lang="en-US" sz="1100" b="1" dirty="0">
-                <a:solidFill>
-                  <a:srgbClr val="E4022D"/>
-                </a:solidFill>
-                <a:latin typeface="DM Sans" pitchFamily="34" charset="0"/>
-                <a:ea typeface="DM Sans" pitchFamily="34" charset="-122"/>
-                <a:cs typeface="DM Sans" pitchFamily="34" charset="-120"/>
-              </a:rPr>
-              <a:t>✓</a:t>
-            </a:r>
-            <a:endParaRPr lang="en-US" sz="1100" dirty="0"/>
-          </a:p>
-        </p:txBody>
-      </p:sp>
-      <p:sp>
-        <p:nvSpPr>
-          <p:cNvPr id="36" name="Text 33"/>
-          <p:cNvSpPr/>
-          <p:nvPr/>
-        </p:nvSpPr>
-        <p:spPr>
-          <a:xfrm>
-            <a:off x="4686198" y="4343400"/>
-            <a:ext cx="2990748" cy="190500"/>
-          </a:xfrm>
-          <a:prstGeom prst="rect">
-            <a:avLst/>
-          </a:prstGeom>
-          <a:noFill/>
-          <a:ln/>
-        </p:spPr>
-        <p:txBody>
-          <a:bodyPr wrap="square" rtlCol="0" anchor="ctr"/>
-          <a:lstStyle/>
-          <a:p>
-            <a:pPr indent="0" marL="0">
-              <a:buNone/>
-            </a:pPr>
-            <a:r>
-              <a:rPr lang="en-US" sz="1200" dirty="0">
-                <a:solidFill>
-                  <a:srgbClr val="0B0F14"/>
-                </a:solidFill>
-                <a:latin typeface="DM Sans" pitchFamily="34" charset="0"/>
-                <a:ea typeface="DM Sans" pitchFamily="34" charset="-122"/>
-                <a:cs typeface="DM Sans" pitchFamily="34" charset="-120"/>
-              </a:rPr>
-              <a:t>Weekly operating cadence</a:t>
-            </a:r>
-            <a:endParaRPr lang="en-US" sz="1200" dirty="0"/>
-          </a:p>
-        </p:txBody>
-      </p:sp>
-      <p:sp>
-        <p:nvSpPr>
-          <p:cNvPr id="37" name="Text 34"/>
-          <p:cNvSpPr/>
-          <p:nvPr/>
-        </p:nvSpPr>
-        <p:spPr>
-          <a:xfrm>
-            <a:off x="4514748" y="4552950"/>
-            <a:ext cx="133350" cy="152400"/>
-          </a:xfrm>
-          <a:prstGeom prst="rect">
-            <a:avLst/>
-          </a:prstGeom>
-          <a:noFill/>
-          <a:ln/>
-        </p:spPr>
-        <p:txBody>
-          <a:bodyPr wrap="square" rtlCol="0" anchor="ctr"/>
-          <a:lstStyle/>
-          <a:p>
-            <a:pPr indent="0" marL="0">
-              <a:buNone/>
-            </a:pPr>
-            <a:r>
-              <a:rPr lang="en-US" sz="1100" b="1" dirty="0">
-                <a:solidFill>
-                  <a:srgbClr val="E4022D"/>
-                </a:solidFill>
-                <a:latin typeface="DM Sans" pitchFamily="34" charset="0"/>
-                <a:ea typeface="DM Sans" pitchFamily="34" charset="-122"/>
-                <a:cs typeface="DM Sans" pitchFamily="34" charset="-120"/>
-              </a:rPr>
-              <a:t>✓</a:t>
-            </a:r>
-            <a:endParaRPr lang="en-US" sz="1100" dirty="0"/>
-          </a:p>
-        </p:txBody>
-      </p:sp>
-      <p:sp>
-        <p:nvSpPr>
-          <p:cNvPr id="38" name="Text 35"/>
-          <p:cNvSpPr/>
-          <p:nvPr/>
-        </p:nvSpPr>
-        <p:spPr>
-          <a:xfrm>
-            <a:off x="4686198" y="4533900"/>
-            <a:ext cx="2990748" cy="190500"/>
-          </a:xfrm>
-          <a:prstGeom prst="rect">
-            <a:avLst/>
-          </a:prstGeom>
-          <a:noFill/>
-          <a:ln/>
-        </p:spPr>
-        <p:txBody>
-          <a:bodyPr wrap="square" rtlCol="0" anchor="ctr"/>
-          <a:lstStyle/>
-          <a:p>
-            <a:pPr indent="0" marL="0">
-              <a:buNone/>
-            </a:pPr>
-            <a:r>
-              <a:rPr lang="en-US" sz="1200" dirty="0">
-                <a:solidFill>
-                  <a:srgbClr val="0B0F14"/>
-                </a:solidFill>
-                <a:latin typeface="DM Sans" pitchFamily="34" charset="0"/>
-                <a:ea typeface="DM Sans" pitchFamily="34" charset="-122"/>
-                <a:cs typeface="DM Sans" pitchFamily="34" charset="-120"/>
-              </a:rPr>
-              <a:t>Full design + engineering</a:t>
-            </a:r>
-            <a:endParaRPr lang="en-US" sz="1200" dirty="0"/>
-          </a:p>
-        </p:txBody>
-      </p:sp>
-      <p:sp>
-        <p:nvSpPr>
-          <p:cNvPr id="39" name="Text 36"/>
-          <p:cNvSpPr/>
-          <p:nvPr/>
-        </p:nvSpPr>
-        <p:spPr>
-          <a:xfrm>
-            <a:off x="4514748" y="4743450"/>
-            <a:ext cx="133350" cy="152400"/>
-          </a:xfrm>
-          <a:prstGeom prst="rect">
-            <a:avLst/>
-          </a:prstGeom>
-          <a:noFill/>
-          <a:ln/>
-        </p:spPr>
-        <p:txBody>
-          <a:bodyPr wrap="square" rtlCol="0" anchor="ctr"/>
-          <a:lstStyle/>
-          <a:p>
-            <a:pPr indent="0" marL="0">
-              <a:buNone/>
-            </a:pPr>
-            <a:r>
-              <a:rPr lang="en-US" sz="1100" b="1" dirty="0">
-                <a:solidFill>
-                  <a:srgbClr val="E4022D"/>
-                </a:solidFill>
-                <a:latin typeface="DM Sans" pitchFamily="34" charset="0"/>
-                <a:ea typeface="DM Sans" pitchFamily="34" charset="-122"/>
-                <a:cs typeface="DM Sans" pitchFamily="34" charset="-120"/>
-              </a:rPr>
-              <a:t>✓</a:t>
-            </a:r>
-            <a:endParaRPr lang="en-US" sz="1100" dirty="0"/>
-          </a:p>
-        </p:txBody>
+          <p:cNvPr id="39" name="Shape 36"/>
+          <p:cNvSpPr/>
+          <p:nvPr/>
+        </p:nvSpPr>
+        <p:spPr>
+          <a:xfrm>
+            <a:off x="4533798" y="4895850"/>
+            <a:ext cx="57150" cy="57150"/>
+          </a:xfrm>
+          <a:prstGeom prst="ellipse">
+            <a:avLst/>
+          </a:prstGeom>
+          <a:solidFill>
+            <a:srgbClr val="E4022D"/>
+          </a:solidFill>
+          <a:ln w="12700">
+            <a:solidFill>
+              <a:srgbClr val="E4022D"/>
+            </a:solidFill>
+            <a:prstDash val="solid"/>
+          </a:ln>
+        </p:spPr>
       </p:sp>
       <p:sp>
         <p:nvSpPr>
@@ -5219,8 +5079,8 @@
         </p:nvSpPr>
         <p:spPr>
           <a:xfrm>
-            <a:off x="4686198" y="4724400"/>
-            <a:ext cx="2990748" cy="190500"/>
+            <a:off x="4667148" y="4819650"/>
+            <a:ext cx="3009798" cy="209550"/>
           </a:xfrm>
           <a:prstGeom prst="rect">
             <a:avLst/>
@@ -5485,53 +5345,103 @@
       </p:sp>
       <p:sp>
         <p:nvSpPr>
-          <p:cNvPr id="48" name="Text 45"/>
-          <p:cNvSpPr/>
-          <p:nvPr/>
-        </p:nvSpPr>
-        <p:spPr>
-          <a:xfrm>
-            <a:off x="8286547" y="3981450"/>
-            <a:ext cx="133350" cy="152400"/>
-          </a:xfrm>
-          <a:prstGeom prst="rect">
-            <a:avLst/>
-          </a:prstGeom>
-          <a:noFill/>
-          <a:ln/>
-        </p:spPr>
-        <p:txBody>
-          <a:bodyPr wrap="square" rtlCol="0" anchor="ctr"/>
-          <a:lstStyle/>
-          <a:p>
-            <a:pPr indent="0" marL="0">
-              <a:buNone/>
-            </a:pPr>
-            <a:r>
-              <a:rPr lang="en-US" sz="1100" b="1" dirty="0">
-                <a:solidFill>
-                  <a:srgbClr val="E4022D"/>
+          <p:cNvPr id="48" name="Shape 45"/>
+          <p:cNvSpPr/>
+          <p:nvPr/>
+        </p:nvSpPr>
+        <p:spPr>
+          <a:xfrm>
+            <a:off x="8305597" y="4057650"/>
+            <a:ext cx="57150" cy="57150"/>
+          </a:xfrm>
+          <a:prstGeom prst="ellipse">
+            <a:avLst/>
+          </a:prstGeom>
+          <a:solidFill>
+            <a:srgbClr val="E4022D"/>
+          </a:solidFill>
+          <a:ln w="12700">
+            <a:solidFill>
+              <a:srgbClr val="E4022D"/>
+            </a:solidFill>
+            <a:prstDash val="solid"/>
+          </a:ln>
+        </p:spPr>
+      </p:sp>
+      <p:sp>
+        <p:nvSpPr>
+          <p:cNvPr id="49" name="Text 46"/>
+          <p:cNvSpPr/>
+          <p:nvPr/>
+        </p:nvSpPr>
+        <p:spPr>
+          <a:xfrm>
+            <a:off x="8438947" y="3981450"/>
+            <a:ext cx="3009798" cy="209550"/>
+          </a:xfrm>
+          <a:prstGeom prst="rect">
+            <a:avLst/>
+          </a:prstGeom>
+          <a:noFill/>
+          <a:ln/>
+        </p:spPr>
+        <p:txBody>
+          <a:bodyPr wrap="square" rtlCol="0" anchor="ctr"/>
+          <a:lstStyle/>
+          <a:p>
+            <a:pPr indent="0" marL="0">
+              <a:buNone/>
+            </a:pPr>
+            <a:r>
+              <a:rPr lang="en-US" sz="1200" dirty="0">
+                <a:solidFill>
+                  <a:srgbClr val="0B0F14"/>
                 </a:solidFill>
                 <a:latin typeface="DM Sans" pitchFamily="34" charset="0"/>
                 <a:ea typeface="DM Sans" pitchFamily="34" charset="-122"/>
                 <a:cs typeface="DM Sans" pitchFamily="34" charset="-120"/>
               </a:rPr>
-              <a:t>✓</a:t>
-            </a:r>
-            <a:endParaRPr lang="en-US" sz="1100" dirty="0"/>
-          </a:p>
-        </p:txBody>
-      </p:sp>
-      <p:sp>
-        <p:nvSpPr>
-          <p:cNvPr id="49" name="Text 46"/>
-          <p:cNvSpPr/>
-          <p:nvPr/>
-        </p:nvSpPr>
-        <p:spPr>
-          <a:xfrm>
-            <a:off x="8457997" y="3962400"/>
-            <a:ext cx="2990748" cy="190500"/>
+              <a:t>Multi-pod deployment</a:t>
+            </a:r>
+            <a:endParaRPr lang="en-US" sz="1200" dirty="0"/>
+          </a:p>
+        </p:txBody>
+      </p:sp>
+      <p:sp>
+        <p:nvSpPr>
+          <p:cNvPr id="50" name="Shape 47"/>
+          <p:cNvSpPr/>
+          <p:nvPr/>
+        </p:nvSpPr>
+        <p:spPr>
+          <a:xfrm>
+            <a:off x="8305597" y="4267200"/>
+            <a:ext cx="57150" cy="57150"/>
+          </a:xfrm>
+          <a:prstGeom prst="ellipse">
+            <a:avLst/>
+          </a:prstGeom>
+          <a:solidFill>
+            <a:srgbClr val="E4022D"/>
+          </a:solidFill>
+          <a:ln w="12700">
+            <a:solidFill>
+              <a:srgbClr val="E4022D"/>
+            </a:solidFill>
+            <a:prstDash val="solid"/>
+          </a:ln>
+        </p:spPr>
+      </p:sp>
+      <p:sp>
+        <p:nvSpPr>
+          <p:cNvPr id="51" name="Text 48"/>
+          <p:cNvSpPr/>
+          <p:nvPr/>
+        </p:nvSpPr>
+        <p:spPr>
+          <a:xfrm>
+            <a:off x="8438947" y="4191000"/>
+            <a:ext cx="3009798" cy="209550"/>
           </a:xfrm>
           <a:prstGeom prst="rect">
             <a:avLst/>
@@ -5555,7 +5465,7 @@
                 <a:ea typeface="DM Sans" pitchFamily="34" charset="-122"/>
                 <a:cs typeface="DM Sans" pitchFamily="34" charset="-120"/>
               </a:rPr>
-              <a:t>Multi-pod deployment</a:t>
+              <a:t>Dedicated AI &amp; data team</a:t>
             </a:r>
             <a:endParaRPr lang="en-US" sz="1200" dirty="0"/>
           </a:p>
@@ -5563,53 +5473,103 @@
       </p:sp>
       <p:sp>
         <p:nvSpPr>
-          <p:cNvPr id="50" name="Text 47"/>
-          <p:cNvSpPr/>
-          <p:nvPr/>
-        </p:nvSpPr>
-        <p:spPr>
-          <a:xfrm>
-            <a:off x="8286547" y="4171950"/>
-            <a:ext cx="133350" cy="152400"/>
-          </a:xfrm>
-          <a:prstGeom prst="rect">
-            <a:avLst/>
-          </a:prstGeom>
-          <a:noFill/>
-          <a:ln/>
-        </p:spPr>
-        <p:txBody>
-          <a:bodyPr wrap="square" rtlCol="0" anchor="ctr"/>
-          <a:lstStyle/>
-          <a:p>
-            <a:pPr indent="0" marL="0">
-              <a:buNone/>
-            </a:pPr>
-            <a:r>
-              <a:rPr lang="en-US" sz="1100" b="1" dirty="0">
-                <a:solidFill>
-                  <a:srgbClr val="E4022D"/>
+          <p:cNvPr id="52" name="Shape 49"/>
+          <p:cNvSpPr/>
+          <p:nvPr/>
+        </p:nvSpPr>
+        <p:spPr>
+          <a:xfrm>
+            <a:off x="8305597" y="4476750"/>
+            <a:ext cx="57150" cy="57150"/>
+          </a:xfrm>
+          <a:prstGeom prst="ellipse">
+            <a:avLst/>
+          </a:prstGeom>
+          <a:solidFill>
+            <a:srgbClr val="E4022D"/>
+          </a:solidFill>
+          <a:ln w="12700">
+            <a:solidFill>
+              <a:srgbClr val="E4022D"/>
+            </a:solidFill>
+            <a:prstDash val="solid"/>
+          </a:ln>
+        </p:spPr>
+      </p:sp>
+      <p:sp>
+        <p:nvSpPr>
+          <p:cNvPr id="53" name="Text 50"/>
+          <p:cNvSpPr/>
+          <p:nvPr/>
+        </p:nvSpPr>
+        <p:spPr>
+          <a:xfrm>
+            <a:off x="8438947" y="4400550"/>
+            <a:ext cx="3009798" cy="209550"/>
+          </a:xfrm>
+          <a:prstGeom prst="rect">
+            <a:avLst/>
+          </a:prstGeom>
+          <a:noFill/>
+          <a:ln/>
+        </p:spPr>
+        <p:txBody>
+          <a:bodyPr wrap="square" rtlCol="0" anchor="ctr"/>
+          <a:lstStyle/>
+          <a:p>
+            <a:pPr indent="0" marL="0">
+              <a:buNone/>
+            </a:pPr>
+            <a:r>
+              <a:rPr lang="en-US" sz="1200" dirty="0">
+                <a:solidFill>
+                  <a:srgbClr val="0B0F14"/>
                 </a:solidFill>
                 <a:latin typeface="DM Sans" pitchFamily="34" charset="0"/>
                 <a:ea typeface="DM Sans" pitchFamily="34" charset="-122"/>
                 <a:cs typeface="DM Sans" pitchFamily="34" charset="-120"/>
               </a:rPr>
-              <a:t>✓</a:t>
-            </a:r>
-            <a:endParaRPr lang="en-US" sz="1100" dirty="0"/>
-          </a:p>
-        </p:txBody>
-      </p:sp>
-      <p:sp>
-        <p:nvSpPr>
-          <p:cNvPr id="51" name="Text 48"/>
-          <p:cNvSpPr/>
-          <p:nvPr/>
-        </p:nvSpPr>
-        <p:spPr>
-          <a:xfrm>
-            <a:off x="8457997" y="4152900"/>
-            <a:ext cx="2990748" cy="190500"/>
+              <a:t>24/7 operational coverage</a:t>
+            </a:r>
+            <a:endParaRPr lang="en-US" sz="1200" dirty="0"/>
+          </a:p>
+        </p:txBody>
+      </p:sp>
+      <p:sp>
+        <p:nvSpPr>
+          <p:cNvPr id="54" name="Shape 51"/>
+          <p:cNvSpPr/>
+          <p:nvPr/>
+        </p:nvSpPr>
+        <p:spPr>
+          <a:xfrm>
+            <a:off x="8305597" y="4686300"/>
+            <a:ext cx="57150" cy="57150"/>
+          </a:xfrm>
+          <a:prstGeom prst="ellipse">
+            <a:avLst/>
+          </a:prstGeom>
+          <a:solidFill>
+            <a:srgbClr val="E4022D"/>
+          </a:solidFill>
+          <a:ln w="12700">
+            <a:solidFill>
+              <a:srgbClr val="E4022D"/>
+            </a:solidFill>
+            <a:prstDash val="solid"/>
+          </a:ln>
+        </p:spPr>
+      </p:sp>
+      <p:sp>
+        <p:nvSpPr>
+          <p:cNvPr id="55" name="Text 52"/>
+          <p:cNvSpPr/>
+          <p:nvPr/>
+        </p:nvSpPr>
+        <p:spPr>
+          <a:xfrm>
+            <a:off x="8438947" y="4610100"/>
+            <a:ext cx="3009798" cy="209550"/>
           </a:xfrm>
           <a:prstGeom prst="rect">
             <a:avLst/>
@@ -5633,7 +5593,7 @@
                 <a:ea typeface="DM Sans" pitchFamily="34" charset="-122"/>
                 <a:cs typeface="DM Sans" pitchFamily="34" charset="-120"/>
               </a:rPr>
-              <a:t>Dedicated AI &amp; data team</a:t>
+              <a:t>Regional legal &amp; compliance</a:t>
             </a:r>
             <a:endParaRPr lang="en-US" sz="1200" dirty="0"/>
           </a:p>
@@ -5641,198 +5601,28 @@
       </p:sp>
       <p:sp>
         <p:nvSpPr>
-          <p:cNvPr id="52" name="Text 49"/>
-          <p:cNvSpPr/>
-          <p:nvPr/>
-        </p:nvSpPr>
-        <p:spPr>
-          <a:xfrm>
-            <a:off x="8286547" y="4362450"/>
-            <a:ext cx="133350" cy="152400"/>
-          </a:xfrm>
-          <a:prstGeom prst="rect">
-            <a:avLst/>
-          </a:prstGeom>
-          <a:noFill/>
-          <a:ln/>
-        </p:spPr>
-        <p:txBody>
-          <a:bodyPr wrap="square" rtlCol="0" anchor="ctr"/>
-          <a:lstStyle/>
-          <a:p>
-            <a:pPr indent="0" marL="0">
-              <a:buNone/>
-            </a:pPr>
-            <a:r>
-              <a:rPr lang="en-US" sz="1100" b="1" dirty="0">
-                <a:solidFill>
-                  <a:srgbClr val="E4022D"/>
-                </a:solidFill>
-                <a:latin typeface="DM Sans" pitchFamily="34" charset="0"/>
-                <a:ea typeface="DM Sans" pitchFamily="34" charset="-122"/>
-                <a:cs typeface="DM Sans" pitchFamily="34" charset="-120"/>
-              </a:rPr>
-              <a:t>✓</a:t>
-            </a:r>
-            <a:endParaRPr lang="en-US" sz="1100" dirty="0"/>
-          </a:p>
-        </p:txBody>
-      </p:sp>
-      <p:sp>
-        <p:nvSpPr>
-          <p:cNvPr id="53" name="Text 50"/>
-          <p:cNvSpPr/>
-          <p:nvPr/>
-        </p:nvSpPr>
-        <p:spPr>
-          <a:xfrm>
-            <a:off x="8457997" y="4343400"/>
-            <a:ext cx="2990748" cy="190500"/>
-          </a:xfrm>
-          <a:prstGeom prst="rect">
-            <a:avLst/>
-          </a:prstGeom>
-          <a:noFill/>
-          <a:ln/>
-        </p:spPr>
-        <p:txBody>
-          <a:bodyPr wrap="square" rtlCol="0" anchor="ctr"/>
-          <a:lstStyle/>
-          <a:p>
-            <a:pPr indent="0" marL="0">
-              <a:buNone/>
-            </a:pPr>
-            <a:r>
-              <a:rPr lang="en-US" sz="1200" dirty="0">
-                <a:solidFill>
-                  <a:srgbClr val="0B0F14"/>
-                </a:solidFill>
-                <a:latin typeface="DM Sans" pitchFamily="34" charset="0"/>
-                <a:ea typeface="DM Sans" pitchFamily="34" charset="-122"/>
-                <a:cs typeface="DM Sans" pitchFamily="34" charset="-120"/>
-              </a:rPr>
-              <a:t>24/7 operational coverage</a:t>
-            </a:r>
-            <a:endParaRPr lang="en-US" sz="1200" dirty="0"/>
-          </a:p>
-        </p:txBody>
-      </p:sp>
-      <p:sp>
-        <p:nvSpPr>
-          <p:cNvPr id="54" name="Text 51"/>
-          <p:cNvSpPr/>
-          <p:nvPr/>
-        </p:nvSpPr>
-        <p:spPr>
-          <a:xfrm>
-            <a:off x="8286547" y="4552950"/>
-            <a:ext cx="133350" cy="152400"/>
-          </a:xfrm>
-          <a:prstGeom prst="rect">
-            <a:avLst/>
-          </a:prstGeom>
-          <a:noFill/>
-          <a:ln/>
-        </p:spPr>
-        <p:txBody>
-          <a:bodyPr wrap="square" rtlCol="0" anchor="ctr"/>
-          <a:lstStyle/>
-          <a:p>
-            <a:pPr indent="0" marL="0">
-              <a:buNone/>
-            </a:pPr>
-            <a:r>
-              <a:rPr lang="en-US" sz="1100" b="1" dirty="0">
-                <a:solidFill>
-                  <a:srgbClr val="E4022D"/>
-                </a:solidFill>
-                <a:latin typeface="DM Sans" pitchFamily="34" charset="0"/>
-                <a:ea typeface="DM Sans" pitchFamily="34" charset="-122"/>
-                <a:cs typeface="DM Sans" pitchFamily="34" charset="-120"/>
-              </a:rPr>
-              <a:t>✓</a:t>
-            </a:r>
-            <a:endParaRPr lang="en-US" sz="1100" dirty="0"/>
-          </a:p>
-        </p:txBody>
-      </p:sp>
-      <p:sp>
-        <p:nvSpPr>
-          <p:cNvPr id="55" name="Text 52"/>
-          <p:cNvSpPr/>
-          <p:nvPr/>
-        </p:nvSpPr>
-        <p:spPr>
-          <a:xfrm>
-            <a:off x="8457997" y="4533900"/>
-            <a:ext cx="2990748" cy="190500"/>
-          </a:xfrm>
-          <a:prstGeom prst="rect">
-            <a:avLst/>
-          </a:prstGeom>
-          <a:noFill/>
-          <a:ln/>
-        </p:spPr>
-        <p:txBody>
-          <a:bodyPr wrap="square" rtlCol="0" anchor="ctr"/>
-          <a:lstStyle/>
-          <a:p>
-            <a:pPr indent="0" marL="0">
-              <a:buNone/>
-            </a:pPr>
-            <a:r>
-              <a:rPr lang="en-US" sz="1200" dirty="0">
-                <a:solidFill>
-                  <a:srgbClr val="0B0F14"/>
-                </a:solidFill>
-                <a:latin typeface="DM Sans" pitchFamily="34" charset="0"/>
-                <a:ea typeface="DM Sans" pitchFamily="34" charset="-122"/>
-                <a:cs typeface="DM Sans" pitchFamily="34" charset="-120"/>
-              </a:rPr>
-              <a:t>Regional legal &amp; compliance</a:t>
-            </a:r>
-            <a:endParaRPr lang="en-US" sz="1200" dirty="0"/>
-          </a:p>
-        </p:txBody>
-      </p:sp>
-      <p:sp>
-        <p:nvSpPr>
-          <p:cNvPr id="56" name="Text 53"/>
-          <p:cNvSpPr/>
-          <p:nvPr/>
-        </p:nvSpPr>
-        <p:spPr>
-          <a:xfrm>
-            <a:off x="8286547" y="4743450"/>
-            <a:ext cx="133350" cy="152400"/>
-          </a:xfrm>
-          <a:prstGeom prst="rect">
-            <a:avLst/>
-          </a:prstGeom>
-          <a:noFill/>
-          <a:ln/>
-        </p:spPr>
-        <p:txBody>
-          <a:bodyPr wrap="square" rtlCol="0" anchor="ctr"/>
-          <a:lstStyle/>
-          <a:p>
-            <a:pPr indent="0" marL="0">
-              <a:buNone/>
-            </a:pPr>
-            <a:r>
-              <a:rPr lang="en-US" sz="1100" b="1" dirty="0">
-                <a:solidFill>
-                  <a:srgbClr val="E4022D"/>
-                </a:solidFill>
-                <a:latin typeface="DM Sans" pitchFamily="34" charset="0"/>
-                <a:ea typeface="DM Sans" pitchFamily="34" charset="-122"/>
-                <a:cs typeface="DM Sans" pitchFamily="34" charset="-120"/>
-              </a:rPr>
-              <a:t>✓</a:t>
-            </a:r>
-            <a:endParaRPr lang="en-US" sz="1100" dirty="0"/>
-          </a:p>
-        </p:txBody>
+          <p:cNvPr id="56" name="Shape 53"/>
+          <p:cNvSpPr/>
+          <p:nvPr/>
+        </p:nvSpPr>
+        <p:spPr>
+          <a:xfrm>
+            <a:off x="8305597" y="4895850"/>
+            <a:ext cx="57150" cy="57150"/>
+          </a:xfrm>
+          <a:prstGeom prst="ellipse">
+            <a:avLst/>
+          </a:prstGeom>
+          <a:solidFill>
+            <a:srgbClr val="E4022D"/>
+          </a:solidFill>
+          <a:ln w="12700">
+            <a:solidFill>
+              <a:srgbClr val="E4022D"/>
+            </a:solidFill>
+            <a:prstDash val="solid"/>
+          </a:ln>
+        </p:spPr>
       </p:sp>
       <p:sp>
         <p:nvSpPr>
@@ -5842,8 +5632,8 @@
         </p:nvSpPr>
         <p:spPr>
           <a:xfrm>
-            <a:off x="8457997" y="4724400"/>
-            <a:ext cx="2990748" cy="190500"/>
+            <a:off x="8438947" y="4819650"/>
+            <a:ext cx="3009798" cy="209550"/>
           </a:xfrm>
           <a:prstGeom prst="rect">
             <a:avLst/>
@@ -6042,8 +5832,8 @@
         </p:nvSpPr>
         <p:spPr>
           <a:xfrm>
-            <a:off x="11048695" y="6343650"/>
-            <a:ext cx="609600" cy="171450"/>
+            <a:off x="10667695" y="6343650"/>
+            <a:ext cx="990600" cy="171450"/>
           </a:xfrm>
           <a:prstGeom prst="rect">
             <a:avLst/>
@@ -6059,7 +5849,7 @@
               <a:buNone/>
             </a:pPr>
             <a:r>
-              <a:rPr lang="en-US" sz="1000" spc="200" kern="0" dirty="0">
+              <a:rPr lang="en-US" sz="1000" spc="100" kern="0" dirty="0">
                 <a:solidFill>
                   <a:srgbClr val="7A828C"/>
                 </a:solidFill>
@@ -7275,8 +7065,8 @@
         </p:nvSpPr>
         <p:spPr>
           <a:xfrm>
-            <a:off x="11048695" y="6343650"/>
-            <a:ext cx="609600" cy="171450"/>
+            <a:off x="10667695" y="6343650"/>
+            <a:ext cx="990600" cy="171450"/>
           </a:xfrm>
           <a:prstGeom prst="rect">
             <a:avLst/>
@@ -7292,7 +7082,7 @@
               <a:buNone/>
             </a:pPr>
             <a:r>
-              <a:rPr lang="en-US" sz="1000" spc="200" kern="0" dirty="0">
+              <a:rPr lang="en-US" sz="1000" spc="100" kern="0" dirty="0">
                 <a:solidFill>
                   <a:srgbClr val="7A828C"/>
                 </a:solidFill>
@@ -7435,7 +7225,7 @@
         <p:spPr>
           <a:xfrm>
             <a:off x="609600" y="2838450"/>
-            <a:ext cx="2628824" cy="990600"/>
+            <a:ext cx="2628824" cy="577850"/>
           </a:xfrm>
           <a:prstGeom prst="rect">
             <a:avLst/>
@@ -7460,7 +7250,7 @@
         <p:spPr>
           <a:xfrm>
             <a:off x="609600" y="2838450"/>
-            <a:ext cx="2628824" cy="990600"/>
+            <a:ext cx="2628824" cy="577850"/>
           </a:xfrm>
           <a:prstGeom prst="rect">
             <a:avLst/>
@@ -7499,7 +7289,7 @@
         <p:spPr>
           <a:xfrm>
             <a:off x="3390824" y="2838450"/>
-            <a:ext cx="2628824" cy="990600"/>
+            <a:ext cx="2628824" cy="577850"/>
           </a:xfrm>
           <a:prstGeom prst="rect">
             <a:avLst/>
@@ -7524,7 +7314,7 @@
         <p:spPr>
           <a:xfrm>
             <a:off x="3390824" y="2838450"/>
-            <a:ext cx="2628824" cy="990600"/>
+            <a:ext cx="2628824" cy="577850"/>
           </a:xfrm>
           <a:prstGeom prst="rect">
             <a:avLst/>
@@ -7563,7 +7353,7 @@
         <p:spPr>
           <a:xfrm>
             <a:off x="6172048" y="2838450"/>
-            <a:ext cx="2628824" cy="990600"/>
+            <a:ext cx="2628824" cy="577850"/>
           </a:xfrm>
           <a:prstGeom prst="rect">
             <a:avLst/>
@@ -7588,7 +7378,7 @@
         <p:spPr>
           <a:xfrm>
             <a:off x="6172048" y="2838450"/>
-            <a:ext cx="2628824" cy="990600"/>
+            <a:ext cx="2628824" cy="577850"/>
           </a:xfrm>
           <a:prstGeom prst="rect">
             <a:avLst/>
@@ -7627,7 +7417,7 @@
         <p:spPr>
           <a:xfrm>
             <a:off x="8953271" y="2838450"/>
-            <a:ext cx="2628824" cy="990600"/>
+            <a:ext cx="2628824" cy="577850"/>
           </a:xfrm>
           <a:prstGeom prst="rect">
             <a:avLst/>
@@ -7652,7 +7442,7 @@
         <p:spPr>
           <a:xfrm>
             <a:off x="8953271" y="2838450"/>
-            <a:ext cx="2628824" cy="990600"/>
+            <a:ext cx="2628824" cy="577850"/>
           </a:xfrm>
           <a:prstGeom prst="rect">
             <a:avLst/>
@@ -7690,8 +7480,8 @@
         </p:nvSpPr>
         <p:spPr>
           <a:xfrm>
-            <a:off x="609600" y="3981450"/>
-            <a:ext cx="2628824" cy="990600"/>
+            <a:off x="609600" y="3568700"/>
+            <a:ext cx="2628824" cy="577850"/>
           </a:xfrm>
           <a:prstGeom prst="rect">
             <a:avLst/>
@@ -7715,8 +7505,8 @@
         </p:nvSpPr>
         <p:spPr>
           <a:xfrm>
-            <a:off x="609600" y="3981450"/>
-            <a:ext cx="2628824" cy="990600"/>
+            <a:off x="609600" y="3568700"/>
+            <a:ext cx="2628824" cy="577850"/>
           </a:xfrm>
           <a:prstGeom prst="rect">
             <a:avLst/>
@@ -7754,8 +7544,8 @@
         </p:nvSpPr>
         <p:spPr>
           <a:xfrm>
-            <a:off x="3390824" y="3981450"/>
-            <a:ext cx="2628824" cy="990600"/>
+            <a:off x="3390824" y="3568700"/>
+            <a:ext cx="2628824" cy="577850"/>
           </a:xfrm>
           <a:prstGeom prst="rect">
             <a:avLst/>
@@ -7779,8 +7569,8 @@
         </p:nvSpPr>
         <p:spPr>
           <a:xfrm>
-            <a:off x="3390824" y="3981450"/>
-            <a:ext cx="2628824" cy="990600"/>
+            <a:off x="3390824" y="3568700"/>
+            <a:ext cx="2628824" cy="577850"/>
           </a:xfrm>
           <a:prstGeom prst="rect">
             <a:avLst/>
@@ -7818,8 +7608,8 @@
         </p:nvSpPr>
         <p:spPr>
           <a:xfrm>
-            <a:off x="6172048" y="3981450"/>
-            <a:ext cx="2628824" cy="990600"/>
+            <a:off x="6172048" y="3568700"/>
+            <a:ext cx="2628824" cy="577850"/>
           </a:xfrm>
           <a:prstGeom prst="rect">
             <a:avLst/>
@@ -7843,8 +7633,8 @@
         </p:nvSpPr>
         <p:spPr>
           <a:xfrm>
-            <a:off x="6172048" y="3981450"/>
-            <a:ext cx="2628824" cy="990600"/>
+            <a:off x="6172048" y="3568700"/>
+            <a:ext cx="2628824" cy="577850"/>
           </a:xfrm>
           <a:prstGeom prst="rect">
             <a:avLst/>
@@ -7882,8 +7672,8 @@
         </p:nvSpPr>
         <p:spPr>
           <a:xfrm>
-            <a:off x="8953271" y="3981450"/>
-            <a:ext cx="2628824" cy="990600"/>
+            <a:off x="8953271" y="3568700"/>
+            <a:ext cx="2628824" cy="577850"/>
           </a:xfrm>
           <a:prstGeom prst="rect">
             <a:avLst/>
@@ -7907,8 +7697,8 @@
         </p:nvSpPr>
         <p:spPr>
           <a:xfrm>
-            <a:off x="8953271" y="3981450"/>
-            <a:ext cx="2628824" cy="990600"/>
+            <a:off x="8953271" y="3568700"/>
+            <a:ext cx="2628824" cy="577850"/>
           </a:xfrm>
           <a:prstGeom prst="rect">
             <a:avLst/>
@@ -7946,8 +7736,8 @@
         </p:nvSpPr>
         <p:spPr>
           <a:xfrm>
-            <a:off x="609600" y="5124450"/>
-            <a:ext cx="2628824" cy="990600"/>
+            <a:off x="609600" y="4298950"/>
+            <a:ext cx="2628824" cy="577850"/>
           </a:xfrm>
           <a:prstGeom prst="rect">
             <a:avLst/>
@@ -7971,8 +7761,8 @@
         </p:nvSpPr>
         <p:spPr>
           <a:xfrm>
-            <a:off x="609600" y="5124450"/>
-            <a:ext cx="2628824" cy="990600"/>
+            <a:off x="609600" y="4298950"/>
+            <a:ext cx="2628824" cy="577850"/>
           </a:xfrm>
           <a:prstGeom prst="rect">
             <a:avLst/>
@@ -8010,8 +7800,8 @@
         </p:nvSpPr>
         <p:spPr>
           <a:xfrm>
-            <a:off x="3390824" y="5124450"/>
-            <a:ext cx="2628824" cy="990600"/>
+            <a:off x="3390824" y="4298950"/>
+            <a:ext cx="2628824" cy="577850"/>
           </a:xfrm>
           <a:prstGeom prst="rect">
             <a:avLst/>
@@ -8035,8 +7825,8 @@
         </p:nvSpPr>
         <p:spPr>
           <a:xfrm>
-            <a:off x="3390824" y="5124450"/>
-            <a:ext cx="2628824" cy="990600"/>
+            <a:off x="3390824" y="4298950"/>
+            <a:ext cx="2628824" cy="577850"/>
           </a:xfrm>
           <a:prstGeom prst="rect">
             <a:avLst/>
@@ -8074,8 +7864,8 @@
         </p:nvSpPr>
         <p:spPr>
           <a:xfrm>
-            <a:off x="6172048" y="5124450"/>
-            <a:ext cx="2628824" cy="990600"/>
+            <a:off x="6172048" y="4298950"/>
+            <a:ext cx="2628824" cy="577850"/>
           </a:xfrm>
           <a:prstGeom prst="rect">
             <a:avLst/>
@@ -8099,8 +7889,8 @@
         </p:nvSpPr>
         <p:spPr>
           <a:xfrm>
-            <a:off x="6172048" y="5124450"/>
-            <a:ext cx="2628824" cy="990600"/>
+            <a:off x="6172048" y="4298950"/>
+            <a:ext cx="2628824" cy="577850"/>
           </a:xfrm>
           <a:prstGeom prst="rect">
             <a:avLst/>
@@ -8138,8 +7928,8 @@
         </p:nvSpPr>
         <p:spPr>
           <a:xfrm>
-            <a:off x="8953271" y="5124450"/>
-            <a:ext cx="2628824" cy="990600"/>
+            <a:off x="8953271" y="4298950"/>
+            <a:ext cx="2628824" cy="577850"/>
           </a:xfrm>
           <a:prstGeom prst="rect">
             <a:avLst/>
@@ -8163,8 +7953,8 @@
         </p:nvSpPr>
         <p:spPr>
           <a:xfrm>
-            <a:off x="8953271" y="5124450"/>
-            <a:ext cx="2628824" cy="990600"/>
+            <a:off x="8953271" y="4298950"/>
+            <a:ext cx="2628824" cy="577850"/>
           </a:xfrm>
           <a:prstGeom prst="rect">
             <a:avLst/>
@@ -8336,8 +8126,8 @@
         </p:nvSpPr>
         <p:spPr>
           <a:xfrm>
-            <a:off x="11048695" y="6343650"/>
-            <a:ext cx="609600" cy="171450"/>
+            <a:off x="10667695" y="6343650"/>
+            <a:ext cx="990600" cy="171450"/>
           </a:xfrm>
           <a:prstGeom prst="rect">
             <a:avLst/>
@@ -8353,7 +8143,7 @@
               <a:buNone/>
             </a:pPr>
             <a:r>
-              <a:rPr lang="en-US" sz="1000" spc="200" kern="0" dirty="0">
+              <a:rPr lang="en-US" sz="1000" spc="100" kern="0" dirty="0">
                 <a:solidFill>
                   <a:srgbClr val="7A828C"/>
                 </a:solidFill>
@@ -8674,8 +8464,8 @@
         </p:nvSpPr>
         <p:spPr>
           <a:xfrm>
-            <a:off x="11048695" y="6343650"/>
-            <a:ext cx="609600" cy="171450"/>
+            <a:off x="10667695" y="6343650"/>
+            <a:ext cx="990600" cy="171450"/>
           </a:xfrm>
           <a:prstGeom prst="rect">
             <a:avLst/>
@@ -8691,7 +8481,7 @@
               <a:buNone/>
             </a:pPr>
             <a:r>
-              <a:rPr lang="en-US" sz="1000" spc="200" kern="0" dirty="0">
+              <a:rPr lang="en-US" sz="1000" spc="100" kern="0" dirty="0">
                 <a:solidFill>
                   <a:srgbClr val="BFC5CC"/>
                 </a:solidFill>
@@ -9157,8 +8947,8 @@
         </p:nvSpPr>
         <p:spPr>
           <a:xfrm>
-            <a:off x="11048695" y="6343650"/>
-            <a:ext cx="609600" cy="171450"/>
+            <a:off x="10667695" y="6343650"/>
+            <a:ext cx="990600" cy="171450"/>
           </a:xfrm>
           <a:prstGeom prst="rect">
             <a:avLst/>
@@ -9174,7 +8964,7 @@
               <a:buNone/>
             </a:pPr>
             <a:r>
-              <a:rPr lang="en-US" sz="1000" spc="200" kern="0" dirty="0">
+              <a:rPr lang="en-US" sz="1000" spc="100" kern="0" dirty="0">
                 <a:solidFill>
                   <a:srgbClr val="BFC5CC"/>
                 </a:solidFill>
@@ -9450,8 +9240,8 @@
         </p:nvSpPr>
         <p:spPr>
           <a:xfrm>
-            <a:off x="11048695" y="6343650"/>
-            <a:ext cx="609600" cy="171450"/>
+            <a:off x="10667695" y="6343650"/>
+            <a:ext cx="990600" cy="171450"/>
           </a:xfrm>
           <a:prstGeom prst="rect">
             <a:avLst/>
@@ -9467,7 +9257,7 @@
               <a:buNone/>
             </a:pPr>
             <a:r>
-              <a:rPr lang="en-US" sz="1000" spc="200" kern="0" dirty="0">
+              <a:rPr lang="en-US" sz="1000" spc="100" kern="0" dirty="0">
                 <a:solidFill>
                   <a:srgbClr val="7A828C"/>
                 </a:solidFill>
@@ -9542,17 +9332,17 @@
         </p:nvSpPr>
         <p:spPr>
           <a:xfrm>
-            <a:off x="533400" y="1504950"/>
-            <a:ext cx="5410048" cy="1905000"/>
-          </a:xfrm>
-          <a:prstGeom prst="rect">
-            <a:avLst/>
-          </a:prstGeom>
-          <a:noFill/>
-          <a:ln/>
-        </p:spPr>
-        <p:txBody>
-          <a:bodyPr wrap="square" rtlCol="0" anchor="ctr"/>
+            <a:off x="533400" y="1219200"/>
+            <a:ext cx="5410048" cy="2286000"/>
+          </a:xfrm>
+          <a:prstGeom prst="rect">
+            <a:avLst/>
+          </a:prstGeom>
+          <a:noFill/>
+          <a:ln/>
+        </p:spPr>
+        <p:txBody>
+          <a:bodyPr wrap="square" rtlCol="0" anchor="t"/>
           <a:lstStyle/>
           <a:p>
             <a:pPr indent="0" marL="0">
@@ -9562,7 +9352,7 @@
               <a:buNone/>
             </a:pPr>
             <a:r>
-              <a:rPr lang="en-US" sz="5600" spc="-100" kern="0" dirty="0">
+              <a:rPr lang="en-US" sz="5200" spc="-100" kern="0" dirty="0">
                 <a:solidFill>
                   <a:srgbClr val="0B0F14"/>
                 </a:solidFill>
@@ -9580,7 +9370,7 @@
               <a:buNone/>
             </a:pPr>
             <a:r>
-              <a:rPr lang="en-US" sz="5600" i="1" spc="-100" kern="0" dirty="0">
+              <a:rPr lang="en-US" sz="5200" i="1" spc="-100" kern="0" dirty="0">
                 <a:solidFill>
                   <a:srgbClr val="E4022D"/>
                 </a:solidFill>
@@ -9597,7 +9387,7 @@
               <a:buNone/>
             </a:pPr>
             <a:r>
-              <a:rPr lang="en-US" sz="5600" spc="-100" kern="0" dirty="0">
+              <a:rPr lang="en-US" sz="5200" spc="-100" kern="0" dirty="0">
                 <a:solidFill>
                   <a:srgbClr val="0B0F14"/>
                 </a:solidFill>
@@ -9607,7 +9397,7 @@
               </a:rPr>
               <a:t> accountable team.</a:t>
             </a:r>
-            <a:endParaRPr lang="en-US" sz="5600" dirty="0"/>
+            <a:endParaRPr lang="en-US" sz="5200" dirty="0"/>
           </a:p>
         </p:txBody>
       </p:sp>
@@ -9619,7 +9409,7 @@
         </p:nvSpPr>
         <p:spPr>
           <a:xfrm>
-            <a:off x="533400" y="3714750"/>
+            <a:off x="533400" y="3429000"/>
             <a:ext cx="5410048" cy="1143000"/>
           </a:xfrm>
           <a:prstGeom prst="rect">
@@ -10348,8 +10138,8 @@
         </p:nvSpPr>
         <p:spPr>
           <a:xfrm>
-            <a:off x="11048695" y="6343650"/>
-            <a:ext cx="609600" cy="171450"/>
+            <a:off x="10667695" y="6343650"/>
+            <a:ext cx="990600" cy="171450"/>
           </a:xfrm>
           <a:prstGeom prst="rect">
             <a:avLst/>
@@ -10365,7 +10155,7 @@
               <a:buNone/>
             </a:pPr>
             <a:r>
-              <a:rPr lang="en-US" sz="1000" spc="200" kern="0" dirty="0">
+              <a:rPr lang="en-US" sz="1000" spc="100" kern="0" dirty="0">
                 <a:solidFill>
                   <a:srgbClr val="7A828C"/>
                 </a:solidFill>
@@ -10407,7 +10197,7 @@
               <a:buNone/>
             </a:pPr>
             <a:r>
-              <a:rPr lang="en-US" sz="28000" spc="-1000" kern="0" dirty="0">
+              <a:rPr lang="en-US" sz="24000" spc="-600" kern="0" dirty="0">
                 <a:solidFill>
                   <a:srgbClr val="0B0F14"/>
                 </a:solidFill>
@@ -10424,17 +10214,34 @@
               <a:buNone/>
             </a:pPr>
             <a:r>
-              <a:rPr lang="en-US" sz="28000" i="1" spc="-1000" kern="0" dirty="0">
-                <a:solidFill>
-                  <a:srgbClr val="E4022D"/>
+              <a:rPr lang="en-US" sz="24000" spc="-600" kern="0" dirty="0">
+                <a:solidFill>
+                  <a:srgbClr val="0B0F14"/>
                 </a:solidFill>
                 <a:latin typeface="Newsreader" pitchFamily="34" charset="0"/>
                 <a:ea typeface="Newsreader" pitchFamily="34" charset="-122"/>
                 <a:cs typeface="Newsreader" pitchFamily="34" charset="-120"/>
               </a:rPr>
+              <a:t> </a:t>
+            </a:r>
+            <a:pPr indent="0" marL="0">
+              <a:lnSpc>
+                <a:spcPct val="100000"/>
+              </a:lnSpc>
+              <a:buNone/>
+            </a:pPr>
+            <a:r>
+              <a:rPr lang="en-US" sz="24000" i="1" spc="-600" kern="0" dirty="0">
+                <a:solidFill>
+                  <a:srgbClr val="E4022D"/>
+                </a:solidFill>
+                <a:latin typeface="Newsreader" pitchFamily="34" charset="0"/>
+                <a:ea typeface="Newsreader" pitchFamily="34" charset="-122"/>
+                <a:cs typeface="Newsreader" pitchFamily="34" charset="-120"/>
+              </a:rPr>
               <a:t>×</a:t>
             </a:r>
-            <a:endParaRPr lang="en-US" sz="28000" dirty="0"/>
+            <a:endParaRPr lang="en-US" sz="24000" dirty="0"/>
           </a:p>
         </p:txBody>
       </p:sp>
@@ -10446,8 +10253,8 @@
         </p:nvSpPr>
         <p:spPr>
           <a:xfrm>
-            <a:off x="6476848" y="2286000"/>
-            <a:ext cx="5181448" cy="171450"/>
+            <a:off x="6286348" y="1905000"/>
+            <a:ext cx="5371948" cy="171450"/>
           </a:xfrm>
           <a:prstGeom prst="rect">
             <a:avLst/>
@@ -10499,27 +10306,27 @@
         </p:nvSpPr>
         <p:spPr>
           <a:xfrm>
-            <a:off x="6476848" y="2571750"/>
-            <a:ext cx="5181448" cy="1333500"/>
-          </a:xfrm>
-          <a:prstGeom prst="rect">
-            <a:avLst/>
-          </a:prstGeom>
-          <a:noFill/>
-          <a:ln/>
-        </p:spPr>
-        <p:txBody>
-          <a:bodyPr wrap="square" rtlCol="0" anchor="ctr"/>
+            <a:off x="6286348" y="2190750"/>
+            <a:ext cx="5371948" cy="1905000"/>
+          </a:xfrm>
+          <a:prstGeom prst="rect">
+            <a:avLst/>
+          </a:prstGeom>
+          <a:noFill/>
+          <a:ln/>
+        </p:spPr>
+        <p:txBody>
+          <a:bodyPr wrap="square" rtlCol="0" anchor="t"/>
           <a:lstStyle/>
           <a:p>
             <a:pPr indent="0" marL="0">
               <a:lnSpc>
-                <a:spcPct val="110000"/>
+                <a:spcPct val="114000"/>
               </a:lnSpc>
               <a:buNone/>
             </a:pPr>
             <a:r>
-              <a:rPr lang="en-US" sz="3400" spc="-50" kern="0" dirty="0">
+              <a:rPr lang="en-US" sz="2600" spc="-20" kern="0" dirty="0">
                 <a:solidFill>
                   <a:srgbClr val="0B0F14"/>
                 </a:solidFill>
@@ -10529,7 +10336,7 @@
               </a:rPr>
               <a:t>Faster delivery than an in-house baseline over a 12-month window.</a:t>
             </a:r>
-            <a:endParaRPr lang="en-US" sz="3400" dirty="0"/>
+            <a:endParaRPr lang="en-US" sz="2600" dirty="0"/>
           </a:p>
         </p:txBody>
       </p:sp>
@@ -10541,8 +10348,8 @@
         </p:nvSpPr>
         <p:spPr>
           <a:xfrm>
-            <a:off x="6476848" y="4038600"/>
-            <a:ext cx="5181448" cy="609600"/>
+            <a:off x="6286348" y="4191000"/>
+            <a:ext cx="5371948" cy="762000"/>
           </a:xfrm>
           <a:prstGeom prst="rect">
             <a:avLst/>
@@ -10583,8 +10390,8 @@
         </p:nvSpPr>
         <p:spPr>
           <a:xfrm>
-            <a:off x="6476848" y="4762500"/>
-            <a:ext cx="5181448" cy="171450"/>
+            <a:off x="6286348" y="5029200"/>
+            <a:ext cx="5371948" cy="171450"/>
           </a:xfrm>
           <a:prstGeom prst="rect">
             <a:avLst/>
@@ -10717,8 +10524,8 @@
         </p:nvSpPr>
         <p:spPr>
           <a:xfrm>
-            <a:off x="11048695" y="6343650"/>
-            <a:ext cx="609600" cy="171450"/>
+            <a:off x="10667695" y="6343650"/>
+            <a:ext cx="990600" cy="171450"/>
           </a:xfrm>
           <a:prstGeom prst="rect">
             <a:avLst/>
@@ -10734,7 +10541,7 @@
               <a:buNone/>
             </a:pPr>
             <a:r>
-              <a:rPr lang="en-US" sz="1000" spc="200" kern="0" dirty="0">
+              <a:rPr lang="en-US" sz="1000" spc="100" kern="0" dirty="0">
                 <a:solidFill>
                   <a:srgbClr val="7A828C"/>
                 </a:solidFill>
@@ -10993,8 +10800,37 @@
         </p:nvSpPr>
         <p:spPr>
           <a:xfrm>
-            <a:off x="0" y="3429000"/>
-            <a:ext cx="12191695" cy="3429000"/>
+            <a:off x="0" y="2743200"/>
+            <a:ext cx="12191695" cy="4114800"/>
+          </a:xfrm>
+          <a:prstGeom prst="rect">
+            <a:avLst/>
+          </a:prstGeom>
+          <a:solidFill>
+            <a:srgbClr val="0B0F14">
+              <a:alpha val="40000"/>
+            </a:srgbClr>
+          </a:solidFill>
+          <a:ln w="12700">
+            <a:solidFill>
+              <a:srgbClr val="0B0F14">
+                <a:alpha val="0"/>
+              </a:srgbClr>
+            </a:solidFill>
+            <a:prstDash val="solid"/>
+          </a:ln>
+        </p:spPr>
+      </p:sp>
+      <p:sp>
+        <p:nvSpPr>
+          <p:cNvPr id="4" name="Shape 1"/>
+          <p:cNvSpPr/>
+          <p:nvPr/>
+        </p:nvSpPr>
+        <p:spPr>
+          <a:xfrm>
+            <a:off x="0" y="3771900"/>
+            <a:ext cx="12191695" cy="3086100"/>
           </a:xfrm>
           <a:prstGeom prst="rect">
             <a:avLst/>
@@ -11016,14 +10852,14 @@
       </p:sp>
       <p:sp>
         <p:nvSpPr>
-          <p:cNvPr id="4" name="Shape 1"/>
-          <p:cNvSpPr/>
-          <p:nvPr/>
-        </p:nvSpPr>
-        <p:spPr>
-          <a:xfrm>
-            <a:off x="0" y="4800600"/>
-            <a:ext cx="12191695" cy="2057400"/>
+          <p:cNvPr id="5" name="Shape 2"/>
+          <p:cNvSpPr/>
+          <p:nvPr/>
+        </p:nvSpPr>
+        <p:spPr>
+          <a:xfrm>
+            <a:off x="0" y="4937760"/>
+            <a:ext cx="12191695" cy="1920240"/>
           </a:xfrm>
           <a:prstGeom prst="rect">
             <a:avLst/>
@@ -11045,7 +10881,7 @@
       </p:sp>
       <p:pic>
         <p:nvPicPr>
-          <p:cNvPr id="5" name="Image 1" descr="/private/tmp/kilowott-deck-build/logo-paper.png">    </p:cNvPr>
+          <p:cNvPr id="6" name="Image 1" descr="/private/tmp/kilowott-deck-build/logo-paper.png">    </p:cNvPr>
           <p:cNvPicPr>
             <a:picLocks noChangeAspect="1"/>
           </p:cNvPicPr>
@@ -11069,7 +10905,7 @@
       </p:pic>
       <p:sp>
         <p:nvSpPr>
-          <p:cNvPr id="6" name="Text 2"/>
+          <p:cNvPr id="7" name="Text 3"/>
           <p:cNvSpPr/>
           <p:nvPr/>
         </p:nvSpPr>
@@ -11108,14 +10944,14 @@
       </p:sp>
       <p:sp>
         <p:nvSpPr>
-          <p:cNvPr id="7" name="Text 3"/>
-          <p:cNvSpPr/>
-          <p:nvPr/>
-        </p:nvSpPr>
-        <p:spPr>
-          <a:xfrm>
-            <a:off x="11048695" y="6343650"/>
-            <a:ext cx="609600" cy="171450"/>
+          <p:cNvPr id="8" name="Text 4"/>
+          <p:cNvSpPr/>
+          <p:nvPr/>
+        </p:nvSpPr>
+        <p:spPr>
+          <a:xfrm>
+            <a:off x="10667695" y="6343650"/>
+            <a:ext cx="990600" cy="171450"/>
           </a:xfrm>
           <a:prstGeom prst="rect">
             <a:avLst/>
@@ -11131,7 +10967,7 @@
               <a:buNone/>
             </a:pPr>
             <a:r>
-              <a:rPr lang="en-US" sz="1000" spc="200" kern="0" dirty="0">
+              <a:rPr lang="en-US" sz="1000" spc="100" kern="0" dirty="0">
                 <a:solidFill>
                   <a:srgbClr val="BFC5CC"/>
                 </a:solidFill>
@@ -11147,13 +10983,13 @@
       </p:sp>
       <p:sp>
         <p:nvSpPr>
-          <p:cNvPr id="8" name="Text 4"/>
-          <p:cNvSpPr/>
-          <p:nvPr/>
-        </p:nvSpPr>
-        <p:spPr>
-          <a:xfrm>
-            <a:off x="533400" y="4381500"/>
+          <p:cNvPr id="9" name="Text 5"/>
+          <p:cNvSpPr/>
+          <p:nvPr/>
+        </p:nvSpPr>
+        <p:spPr>
+          <a:xfrm>
+            <a:off x="533400" y="3810000"/>
             <a:ext cx="11124895" cy="171450"/>
           </a:xfrm>
           <a:prstGeom prst="rect">
@@ -11200,23 +11036,23 @@
       </p:sp>
       <p:sp>
         <p:nvSpPr>
-          <p:cNvPr id="9" name="Text 5"/>
-          <p:cNvSpPr/>
-          <p:nvPr/>
-        </p:nvSpPr>
-        <p:spPr>
-          <a:xfrm>
-            <a:off x="533400" y="4686300"/>
-            <a:ext cx="8000848" cy="1524000"/>
-          </a:xfrm>
-          <a:prstGeom prst="rect">
-            <a:avLst/>
-          </a:prstGeom>
-          <a:noFill/>
-          <a:ln/>
-        </p:spPr>
-        <p:txBody>
-          <a:bodyPr wrap="square" rtlCol="0" anchor="ctr"/>
+          <p:cNvPr id="10" name="Text 6"/>
+          <p:cNvSpPr/>
+          <p:nvPr/>
+        </p:nvSpPr>
+        <p:spPr>
+          <a:xfrm>
+            <a:off x="533400" y="4114800"/>
+            <a:ext cx="8000848" cy="1905000"/>
+          </a:xfrm>
+          <a:prstGeom prst="rect">
+            <a:avLst/>
+          </a:prstGeom>
+          <a:noFill/>
+          <a:ln/>
+        </p:spPr>
+        <p:txBody>
+          <a:bodyPr wrap="square" rtlCol="0" anchor="t"/>
           <a:lstStyle/>
           <a:p>
             <a:pPr indent="0" marL="0">
@@ -11226,7 +11062,7 @@
               <a:buNone/>
             </a:pPr>
             <a:r>
-              <a:rPr lang="en-US" sz="7200" spc="-100" kern="0" dirty="0">
+              <a:rPr lang="en-US" sz="6000" spc="-100" kern="0" dirty="0">
                 <a:solidFill>
                   <a:srgbClr val="FFFFFF"/>
                 </a:solidFill>
@@ -11244,7 +11080,7 @@
               <a:buNone/>
             </a:pPr>
             <a:r>
-              <a:rPr lang="en-US" sz="7200" i="1" spc="-100" kern="0" dirty="0">
+              <a:rPr lang="en-US" sz="6000" i="1" spc="-100" kern="0" dirty="0">
                 <a:solidFill>
                   <a:srgbClr val="E4022D"/>
                 </a:solidFill>
@@ -11261,7 +11097,7 @@
               <a:buNone/>
             </a:pPr>
             <a:r>
-              <a:rPr lang="en-US" sz="7200" spc="-100" kern="0" dirty="0">
+              <a:rPr lang="en-US" sz="6000" spc="-100" kern="0" dirty="0">
                 <a:solidFill>
                   <a:srgbClr val="FFFFFF"/>
                 </a:solidFill>
@@ -11271,7 +11107,7 @@
               </a:rPr>
               <a:t> on a call.</a:t>
             </a:r>
-            <a:endParaRPr lang="en-US" sz="7200" dirty="0"/>
+            <a:endParaRPr lang="en-US" sz="6000" dirty="0"/>
           </a:p>
         </p:txBody>
       </p:sp>
@@ -11378,8 +11214,8 @@
         </p:nvSpPr>
         <p:spPr>
           <a:xfrm>
-            <a:off x="11048695" y="6343650"/>
-            <a:ext cx="609600" cy="171450"/>
+            <a:off x="10667695" y="6343650"/>
+            <a:ext cx="990600" cy="171450"/>
           </a:xfrm>
           <a:prstGeom prst="rect">
             <a:avLst/>
@@ -11395,7 +11231,7 @@
               <a:buNone/>
             </a:pPr>
             <a:r>
-              <a:rPr lang="en-US" sz="1000" spc="200" kern="0" dirty="0">
+              <a:rPr lang="en-US" sz="1000" spc="100" kern="0" dirty="0">
                 <a:solidFill>
                   <a:srgbClr val="BFC5CC"/>
                 </a:solidFill>
@@ -11417,7 +11253,7 @@
         </p:nvSpPr>
         <p:spPr>
           <a:xfrm>
-            <a:off x="533400" y="1905000"/>
+            <a:off x="533400" y="1524000"/>
             <a:ext cx="11124895" cy="171450"/>
           </a:xfrm>
           <a:prstGeom prst="rect">
@@ -11470,27 +11306,27 @@
         </p:nvSpPr>
         <p:spPr>
           <a:xfrm>
-            <a:off x="533400" y="2286000"/>
-            <a:ext cx="11124895" cy="2667000"/>
-          </a:xfrm>
-          <a:prstGeom prst="rect">
-            <a:avLst/>
-          </a:prstGeom>
-          <a:noFill/>
-          <a:ln/>
-        </p:spPr>
-        <p:txBody>
-          <a:bodyPr wrap="square" rtlCol="0" anchor="ctr"/>
+            <a:off x="533400" y="1905000"/>
+            <a:ext cx="11124895" cy="2476500"/>
+          </a:xfrm>
+          <a:prstGeom prst="rect">
+            <a:avLst/>
+          </a:prstGeom>
+          <a:noFill/>
+          <a:ln/>
+        </p:spPr>
+        <p:txBody>
+          <a:bodyPr wrap="square" rtlCol="0" anchor="t"/>
           <a:lstStyle/>
           <a:p>
             <a:pPr indent="0" marL="0">
               <a:lnSpc>
-                <a:spcPct val="100000"/>
+                <a:spcPct val="102000"/>
               </a:lnSpc>
               <a:buNone/>
             </a:pPr>
             <a:r>
-              <a:rPr lang="en-US" sz="8800" spc="-200" kern="0" dirty="0">
+              <a:rPr lang="en-US" sz="6800" spc="-150" kern="0" dirty="0">
                 <a:solidFill>
                   <a:srgbClr val="FFFFFF"/>
                 </a:solidFill>
@@ -11502,12 +11338,12 @@
             </a:r>
             <a:pPr indent="0" marL="0">
               <a:lnSpc>
-                <a:spcPct val="100000"/>
+                <a:spcPct val="102000"/>
               </a:lnSpc>
               <a:buNone/>
             </a:pPr>
             <a:r>
-              <a:rPr lang="en-US" sz="8800" i="1" spc="-200" kern="0" dirty="0">
+              <a:rPr lang="en-US" sz="6800" i="1" spc="-150" kern="0" dirty="0">
                 <a:solidFill>
                   <a:srgbClr val="0B0F14"/>
                 </a:solidFill>
@@ -11519,12 +11355,12 @@
             </a:r>
             <a:pPr indent="0" marL="0">
               <a:lnSpc>
-                <a:spcPct val="100000"/>
+                <a:spcPct val="102000"/>
               </a:lnSpc>
               <a:buNone/>
             </a:pPr>
             <a:r>
-              <a:rPr lang="en-US" sz="8800" spc="-200" kern="0" dirty="0">
+              <a:rPr lang="en-US" sz="6800" spc="-150" kern="0" dirty="0">
                 <a:solidFill>
                   <a:srgbClr val="FFFFFF"/>
                 </a:solidFill>
@@ -11534,17 +11370,17 @@
               </a:rPr>
               <a:t> six weeks</a:t>
             </a:r>
-            <a:endParaRPr lang="en-US" sz="8800" dirty="0"/>
+            <a:endParaRPr lang="en-US" sz="6800" dirty="0"/>
           </a:p>
           <a:p>
             <a:pPr indent="0" marL="0">
               <a:lnSpc>
-                <a:spcPct val="100000"/>
+                <a:spcPct val="102000"/>
               </a:lnSpc>
               <a:buNone/>
             </a:pPr>
             <a:r>
-              <a:rPr lang="en-US" sz="8800" spc="-200" kern="0" dirty="0">
+              <a:rPr lang="en-US" sz="6800" spc="-150" kern="0" dirty="0">
                 <a:solidFill>
                   <a:srgbClr val="FFFFFF"/>
                 </a:solidFill>
@@ -11554,7 +11390,7 @@
               </a:rPr>
               <a:t>count.</a:t>
             </a:r>
-            <a:endParaRPr lang="en-US" sz="8800" dirty="0"/>
+            <a:endParaRPr lang="en-US" sz="6800" dirty="0"/>
           </a:p>
         </p:txBody>
       </p:sp>
@@ -11566,12 +11402,12 @@
         </p:nvSpPr>
         <p:spPr>
           <a:xfrm>
-            <a:off x="533400" y="4953000"/>
-            <a:ext cx="2667000" cy="495300"/>
+            <a:off x="533400" y="5524500"/>
+            <a:ext cx="3048000" cy="533400"/>
           </a:xfrm>
           <a:prstGeom prst="roundRect">
             <a:avLst>
-              <a:gd name="adj" fmla="val 11077"/>
+              <a:gd name="adj" fmla="val 10286"/>
             </a:avLst>
           </a:prstGeom>
           <a:solidFill>
@@ -11593,8 +11429,8 @@
         </p:nvSpPr>
         <p:spPr>
           <a:xfrm>
-            <a:off x="533400" y="4953000"/>
-            <a:ext cx="2667000" cy="495300"/>
+            <a:off x="533400" y="5524500"/>
+            <a:ext cx="3048000" cy="533400"/>
           </a:xfrm>
           <a:prstGeom prst="rect">
             <a:avLst/>
@@ -11632,12 +11468,12 @@
         </p:nvSpPr>
         <p:spPr>
           <a:xfrm>
-            <a:off x="3352800" y="4953000"/>
-            <a:ext cx="2095500" cy="495300"/>
+            <a:off x="3733800" y="5524500"/>
+            <a:ext cx="2286000" cy="533400"/>
           </a:xfrm>
           <a:prstGeom prst="roundRect">
             <a:avLst>
-              <a:gd name="adj" fmla="val 11077"/>
+              <a:gd name="adj" fmla="val 10286"/>
             </a:avLst>
           </a:prstGeom>
           <a:solidFill>
@@ -11659,8 +11495,8 @@
         </p:nvSpPr>
         <p:spPr>
           <a:xfrm>
-            <a:off x="3352800" y="4953000"/>
-            <a:ext cx="2095500" cy="495300"/>
+            <a:off x="3733800" y="5524500"/>
+            <a:ext cx="2286000" cy="533400"/>
           </a:xfrm>
           <a:prstGeom prst="rect">
             <a:avLst/>
@@ -11793,8 +11629,8 @@
         </p:nvSpPr>
         <p:spPr>
           <a:xfrm>
-            <a:off x="11048695" y="6343650"/>
-            <a:ext cx="609600" cy="171450"/>
+            <a:off x="10667695" y="6343650"/>
+            <a:ext cx="990600" cy="171450"/>
           </a:xfrm>
           <a:prstGeom prst="rect">
             <a:avLst/>
@@ -11810,7 +11646,7 @@
               <a:buNone/>
             </a:pPr>
             <a:r>
-              <a:rPr lang="en-US" sz="1000" spc="200" kern="0" dirty="0">
+              <a:rPr lang="en-US" sz="1000" spc="100" kern="0" dirty="0">
                 <a:solidFill>
                   <a:srgbClr val="7A828C"/>
                 </a:solidFill>
@@ -11975,8 +11811,8 @@
         </p:nvSpPr>
         <p:spPr>
           <a:xfrm>
-            <a:off x="533400" y="2800350"/>
-            <a:ext cx="533400" cy="190500"/>
+            <a:off x="533400" y="2667000"/>
+            <a:ext cx="533400" cy="685800"/>
           </a:xfrm>
           <a:prstGeom prst="rect">
             <a:avLst/>
@@ -12014,8 +11850,8 @@
         </p:nvSpPr>
         <p:spPr>
           <a:xfrm>
-            <a:off x="1143000" y="2762250"/>
-            <a:ext cx="3810000" cy="266700"/>
+            <a:off x="1143000" y="2667000"/>
+            <a:ext cx="3810000" cy="685800"/>
           </a:xfrm>
           <a:prstGeom prst="rect">
             <a:avLst/>
@@ -12053,8 +11889,8 @@
         </p:nvSpPr>
         <p:spPr>
           <a:xfrm>
-            <a:off x="5143500" y="2819400"/>
-            <a:ext cx="6286195" cy="400050"/>
+            <a:off x="5143500" y="2667000"/>
+            <a:ext cx="6286195" cy="685800"/>
           </a:xfrm>
           <a:prstGeom prst="rect">
             <a:avLst/>
@@ -12118,8 +11954,8 @@
         </p:nvSpPr>
         <p:spPr>
           <a:xfrm>
-            <a:off x="533400" y="3486150"/>
-            <a:ext cx="533400" cy="190500"/>
+            <a:off x="533400" y="3352800"/>
+            <a:ext cx="533400" cy="685800"/>
           </a:xfrm>
           <a:prstGeom prst="rect">
             <a:avLst/>
@@ -12157,8 +11993,8 @@
         </p:nvSpPr>
         <p:spPr>
           <a:xfrm>
-            <a:off x="1143000" y="3448050"/>
-            <a:ext cx="3810000" cy="266700"/>
+            <a:off x="1143000" y="3352800"/>
+            <a:ext cx="3810000" cy="685800"/>
           </a:xfrm>
           <a:prstGeom prst="rect">
             <a:avLst/>
@@ -12196,8 +12032,8 @@
         </p:nvSpPr>
         <p:spPr>
           <a:xfrm>
-            <a:off x="5143500" y="3505200"/>
-            <a:ext cx="6286195" cy="400050"/>
+            <a:off x="5143500" y="3352800"/>
+            <a:ext cx="6286195" cy="685800"/>
           </a:xfrm>
           <a:prstGeom prst="rect">
             <a:avLst/>
@@ -12261,8 +12097,8 @@
         </p:nvSpPr>
         <p:spPr>
           <a:xfrm>
-            <a:off x="533400" y="4171950"/>
-            <a:ext cx="533400" cy="190500"/>
+            <a:off x="533400" y="4038600"/>
+            <a:ext cx="533400" cy="685800"/>
           </a:xfrm>
           <a:prstGeom prst="rect">
             <a:avLst/>
@@ -12300,8 +12136,8 @@
         </p:nvSpPr>
         <p:spPr>
           <a:xfrm>
-            <a:off x="1143000" y="4133850"/>
-            <a:ext cx="3810000" cy="266700"/>
+            <a:off x="1143000" y="4038600"/>
+            <a:ext cx="3810000" cy="685800"/>
           </a:xfrm>
           <a:prstGeom prst="rect">
             <a:avLst/>
@@ -12339,8 +12175,8 @@
         </p:nvSpPr>
         <p:spPr>
           <a:xfrm>
-            <a:off x="5143500" y="4191000"/>
-            <a:ext cx="6286195" cy="400050"/>
+            <a:off x="5143500" y="4038600"/>
+            <a:ext cx="6286195" cy="685800"/>
           </a:xfrm>
           <a:prstGeom prst="rect">
             <a:avLst/>
@@ -12404,8 +12240,8 @@
         </p:nvSpPr>
         <p:spPr>
           <a:xfrm>
-            <a:off x="533400" y="4857750"/>
-            <a:ext cx="533400" cy="190500"/>
+            <a:off x="533400" y="4724400"/>
+            <a:ext cx="533400" cy="685800"/>
           </a:xfrm>
           <a:prstGeom prst="rect">
             <a:avLst/>
@@ -12443,8 +12279,8 @@
         </p:nvSpPr>
         <p:spPr>
           <a:xfrm>
-            <a:off x="1143000" y="4819650"/>
-            <a:ext cx="3810000" cy="266700"/>
+            <a:off x="1143000" y="4724400"/>
+            <a:ext cx="3810000" cy="685800"/>
           </a:xfrm>
           <a:prstGeom prst="rect">
             <a:avLst/>
@@ -12482,8 +12318,8 @@
         </p:nvSpPr>
         <p:spPr>
           <a:xfrm>
-            <a:off x="5143500" y="4876800"/>
-            <a:ext cx="6286195" cy="400050"/>
+            <a:off x="5143500" y="4724400"/>
+            <a:ext cx="6286195" cy="685800"/>
           </a:xfrm>
           <a:prstGeom prst="rect">
             <a:avLst/>
@@ -12547,8 +12383,8 @@
         </p:nvSpPr>
         <p:spPr>
           <a:xfrm>
-            <a:off x="533400" y="5543550"/>
-            <a:ext cx="533400" cy="190500"/>
+            <a:off x="533400" y="5410200"/>
+            <a:ext cx="533400" cy="685800"/>
           </a:xfrm>
           <a:prstGeom prst="rect">
             <a:avLst/>
@@ -12586,8 +12422,8 @@
         </p:nvSpPr>
         <p:spPr>
           <a:xfrm>
-            <a:off x="1143000" y="5505450"/>
-            <a:ext cx="3810000" cy="266700"/>
+            <a:off x="1143000" y="5410200"/>
+            <a:ext cx="3810000" cy="685800"/>
           </a:xfrm>
           <a:prstGeom prst="rect">
             <a:avLst/>
@@ -12625,8 +12461,8 @@
         </p:nvSpPr>
         <p:spPr>
           <a:xfrm>
-            <a:off x="5143500" y="5562600"/>
-            <a:ext cx="6286195" cy="400050"/>
+            <a:off x="5143500" y="5410200"/>
+            <a:ext cx="6286195" cy="685800"/>
           </a:xfrm>
           <a:prstGeom prst="rect">
             <a:avLst/>
@@ -12785,8 +12621,8 @@
         </p:nvSpPr>
         <p:spPr>
           <a:xfrm>
-            <a:off x="11048695" y="6343650"/>
-            <a:ext cx="609600" cy="171450"/>
+            <a:off x="10667695" y="6343650"/>
+            <a:ext cx="990600" cy="171450"/>
           </a:xfrm>
           <a:prstGeom prst="rect">
             <a:avLst/>
@@ -12802,7 +12638,7 @@
               <a:buNone/>
             </a:pPr>
             <a:r>
-              <a:rPr lang="en-US" sz="1000" spc="200" kern="0" dirty="0">
+              <a:rPr lang="en-US" sz="1000" spc="100" kern="0" dirty="0">
                 <a:solidFill>
                   <a:srgbClr val="7A828C"/>
                 </a:solidFill>
@@ -13011,7 +12847,7 @@
               <a:buNone/>
             </a:pPr>
             <a:r>
-              <a:rPr lang="en-US" sz="1000" spc="100" kern="0" dirty="0">
+              <a:rPr lang="en-US" sz="1000" spc="200" kern="0" dirty="0">
                 <a:solidFill>
                   <a:srgbClr val="5B6573"/>
                 </a:solidFill>
@@ -13019,7 +12855,7 @@
                 <a:ea typeface="JetBrains Mono" pitchFamily="34" charset="-122"/>
                 <a:cs typeface="JetBrains Mono" pitchFamily="34" charset="-120"/>
               </a:rPr>
-              <a:t>[ photo ]</a:t>
+              <a:t>photo</a:t>
             </a:r>
             <a:endParaRPr lang="en-US" sz="1000" dirty="0"/>
           </a:p>
@@ -13259,7 +13095,7 @@
               <a:buNone/>
             </a:pPr>
             <a:r>
-              <a:rPr lang="en-US" sz="1000" spc="100" kern="0" dirty="0">
+              <a:rPr lang="en-US" sz="1000" spc="200" kern="0" dirty="0">
                 <a:solidFill>
                   <a:srgbClr val="5B6573"/>
                 </a:solidFill>
@@ -13267,7 +13103,7 @@
                 <a:ea typeface="JetBrains Mono" pitchFamily="34" charset="-122"/>
                 <a:cs typeface="JetBrains Mono" pitchFamily="34" charset="-120"/>
               </a:rPr>
-              <a:t>[ photo ]</a:t>
+              <a:t>photo</a:t>
             </a:r>
             <a:endParaRPr lang="en-US" sz="1000" dirty="0"/>
           </a:p>
@@ -13507,7 +13343,7 @@
               <a:buNone/>
             </a:pPr>
             <a:r>
-              <a:rPr lang="en-US" sz="1000" spc="100" kern="0" dirty="0">
+              <a:rPr lang="en-US" sz="1000" spc="200" kern="0" dirty="0">
                 <a:solidFill>
                   <a:srgbClr val="5B6573"/>
                 </a:solidFill>
@@ -13515,7 +13351,7 @@
                 <a:ea typeface="JetBrains Mono" pitchFamily="34" charset="-122"/>
                 <a:cs typeface="JetBrains Mono" pitchFamily="34" charset="-120"/>
               </a:rPr>
-              <a:t>[ photo ]</a:t>
+              <a:t>photo</a:t>
             </a:r>
             <a:endParaRPr lang="en-US" sz="1000" dirty="0"/>
           </a:p>

--- a/project/downloads/kilowott-deck-template.pptx
+++ b/project/downloads/kilowott-deck-template.pptx
@@ -13525,7 +13525,7 @@
 </file>
 
 <file path=ppt/theme/theme1.xml><?xml version="1.0" encoding="utf-8"?>
-<a:theme xmlns:a="http://schemas.openxmlformats.org/drawingml/2006/main" name="Office Theme">
+<a:theme xmlns:a="http://schemas.openxmlformats.org/drawingml/2006/main" name="Kilowott">
   <a:themeElements>
     <a:clrScheme name="Office">
       <a:dk1>
@@ -13565,9 +13565,9 @@
         <a:srgbClr val="954F72"/>
       </a:folHlink>
     </a:clrScheme>
-    <a:fontScheme name="Office">
+    <a:fontScheme name="Kilowott">
       <a:majorFont>
-        <a:latin typeface="Calibri Light" panose="020F0302020204030204"/>
+        <a:latin typeface="Newsreader"/>
         <a:ea typeface=""/>
         <a:cs typeface=""/>
         <a:font script="Jpan" typeface="游ゴシック Light"/>
@@ -13619,7 +13619,7 @@
         <a:font script="Tfng" typeface="Ebrima"/>
       </a:majorFont>
       <a:minorFont>
-        <a:latin typeface="Calibri" panose="020F0502020204030204"/>
+        <a:latin typeface="DM Sans"/>
         <a:ea typeface=""/>
         <a:cs typeface=""/>
         <a:font script="Jpan" typeface="游ゴシック"/>
